--- a/assets/figures-editable/c1-c2/c1-e34.pptx
+++ b/assets/figures-editable/c1-c2/c1-e34.pptx
@@ -7,7 +7,7 @@
   <p:sldIdLst>
     <p:sldId id="256" r:id="rId7"/>
   </p:sldIdLst>
-  <p:sldSz cx="11948160" cy="7924799" type="screen4x3"/>
+  <p:sldSz cx="12191695" cy="6858000" type="screen4x3"/>
   <p:notesSz cx="6858000" cy="9144000"/>
   <p:defaultTextStyle>
     <a:defPPr>
@@ -3098,14 +3098,14 @@
       <p:grpSpPr/>
       <p:sp>
         <p:nvSpPr>
-          <p:cNvPr id="2" name="text1" descr="sci-ppt:C1-E34-001"/>
+          <p:cNvPr id="2" name="C1-E34 text 0" descr="sci-ppt:o000"/>
           <p:cNvSpPr txBox="1"/>
           <p:nvPr/>
         </p:nvSpPr>
         <p:spPr>
           <a:xfrm>
-            <a:off x="316992" y="268224"/>
-            <a:ext cx="11277600" cy="359054"/>
+            <a:off x="274320" y="118872"/>
+            <a:ext cx="11612880" cy="340105"/>
           </a:xfrm>
           <a:prstGeom prst="rect">
             <a:avLst/>
@@ -3114,7 +3114,7 @@
           <a:effectLst/>
         </p:spPr>
         <p:txBody>
-          <a:bodyPr wrap="none" lIns="27432" rIns="27432" tIns="18288" bIns="18288" anchor="ctr">
+          <a:bodyPr wrap="none" lIns="18288" rIns="18288" tIns="18288" bIns="18288" anchor="t">
             <a:spAutoFit/>
           </a:bodyPr>
           <a:lstStyle/>
@@ -3125,64 +3125,32 @@
               </a:spcAft>
             </a:pPr>
             <a:r>
-              <a:rPr sz="1823" b="0" i="0">
+              <a:rPr sz="1900" b="1" i="0">
                 <a:solidFill>
                   <a:srgbClr val="8EDBD4"/>
                 </a:solidFill>
                 <a:latin typeface="Arial"/>
               </a:rPr>
-              <a:t>C1-E34 | Physical-variable diagram</a:t>
-            </a:r>
-          </a:p>
-        </p:txBody>
-      </p:sp>
-      <p:sp>
-        <p:nvSpPr>
-          <p:cNvPr id="3" name="rect2" descr="sci-ppt:C1-E34-002"/>
-          <p:cNvSpPr/>
-          <p:nvPr/>
-        </p:nvSpPr>
-        <p:spPr>
-          <a:xfrm>
-            <a:off x="1219200" y="2194560"/>
-            <a:ext cx="8290560" cy="1463040"/>
-          </a:xfrm>
-          <a:prstGeom prst="rect">
-            <a:avLst/>
-          </a:prstGeom>
-          <a:solidFill>
-            <a:srgbClr val="213E4B"/>
-          </a:solidFill>
-          <a:ln w="19050">
-            <a:solidFill>
-              <a:srgbClr val="B4C7D2"/>
-            </a:solidFill>
-          </a:ln>
-          <a:effectLst/>
-        </p:spPr>
-        <p:txBody>
-          <a:bodyPr rtlCol="0" anchor="ctr"/>
-          <a:lstStyle/>
-          <a:p>
-            <a:pPr algn="ctr"/>
+              <a:t>C1-E34 · Original formulas quoted for defense 3</a:t>
+            </a:r>
           </a:p>
         </p:txBody>
       </p:sp>
       <p:cxnSp>
         <p:nvCxnSpPr>
-          <p:cNvPr id="4" name="line3" descr="sci-ppt:C1-E34-003"/>
+          <p:cNvPr id="3" name="C1-E34 line 1" descr="sci-ppt:o001"/>
           <p:cNvCxnSpPr/>
           <p:nvPr/>
         </p:nvCxnSpPr>
         <p:spPr>
           <a:xfrm>
-            <a:off x="1219200" y="2194560"/>
-            <a:ext cx="8290560" cy="0"/>
+            <a:off x="914400" y="3840480"/>
+            <a:ext cx="3566160" cy="0"/>
           </a:xfrm>
           <a:prstGeom prst="line">
             <a:avLst/>
           </a:prstGeom>
-          <a:ln w="25400">
+          <a:ln w="19050">
             <a:solidFill>
               <a:srgbClr val="B4C7D2"/>
             </a:solidFill>
@@ -3192,19 +3160,19 @@
       </p:cxnSp>
       <p:cxnSp>
         <p:nvCxnSpPr>
-          <p:cNvPr id="5" name="line4" descr="sci-ppt:C1-E34-004"/>
+          <p:cNvPr id="4" name="C1-E34 line 2" descr="sci-ppt:o002"/>
           <p:cNvCxnSpPr/>
           <p:nvPr/>
         </p:nvCxnSpPr>
         <p:spPr>
           <a:xfrm>
-            <a:off x="1219200" y="3657600"/>
-            <a:ext cx="8290560" cy="0"/>
+            <a:off x="914400" y="1554480"/>
+            <a:ext cx="0" cy="2286000"/>
           </a:xfrm>
           <a:prstGeom prst="line">
             <a:avLst/>
           </a:prstGeom>
-          <a:ln w="25400">
+          <a:ln w="19050">
             <a:solidFill>
               <a:srgbClr val="B4C7D2"/>
             </a:solidFill>
@@ -3214,21 +3182,3225 @@
       </p:cxnSp>
       <p:cxnSp>
         <p:nvCxnSpPr>
-          <p:cNvPr id="6" name="arrow5" descr="sci-ppt:C1-E34-005"/>
+          <p:cNvPr id="5" name="C1-E34 line 3" descr="sci-ppt:o003"/>
           <p:cNvCxnSpPr/>
           <p:nvPr/>
         </p:nvCxnSpPr>
         <p:spPr>
           <a:xfrm>
-            <a:off x="2316480" y="2926080"/>
-            <a:ext cx="5608319" cy="0"/>
+            <a:off x="914400" y="3840480"/>
+            <a:ext cx="0" cy="64008"/>
           </a:xfrm>
           <a:prstGeom prst="line">
             <a:avLst/>
           </a:prstGeom>
-          <a:ln w="25400">
+          <a:ln w="12700">
+            <a:solidFill>
+              <a:srgbClr val="B4C7D2"/>
+            </a:solidFill>
+          </a:ln>
+          <a:effectLst/>
+        </p:spPr>
+      </p:cxnSp>
+      <p:cxnSp>
+        <p:nvCxnSpPr>
+          <p:cNvPr id="6" name="C1-E34 line 4" descr="sci-ppt:o004"/>
+          <p:cNvCxnSpPr/>
+          <p:nvPr/>
+        </p:nvCxnSpPr>
+        <p:spPr>
+          <a:xfrm>
+            <a:off x="914400" y="1554480"/>
+            <a:ext cx="0" cy="2286000"/>
+          </a:xfrm>
+          <a:prstGeom prst="line">
+            <a:avLst/>
+          </a:prstGeom>
+          <a:ln w="7620">
+            <a:solidFill>
+              <a:srgbClr val="2E4756"/>
+            </a:solidFill>
+          </a:ln>
+          <a:effectLst/>
+        </p:spPr>
+      </p:cxnSp>
+      <p:sp>
+        <p:nvSpPr>
+          <p:cNvPr id="7" name="C1-E34 text 5" descr="sci-ppt:o005"/>
+          <p:cNvSpPr txBox="1"/>
+          <p:nvPr/>
+        </p:nvSpPr>
+        <p:spPr>
+          <a:xfrm>
+            <a:off x="457200" y="3922776"/>
+            <a:ext cx="914400" cy="208407"/>
+          </a:xfrm>
+          <a:prstGeom prst="rect">
+            <a:avLst/>
+          </a:prstGeom>
+          <a:noFill/>
+          <a:effectLst/>
+        </p:spPr>
+        <p:txBody>
+          <a:bodyPr wrap="none" lIns="18288" rIns="18288" tIns="18288" bIns="18288" anchor="t">
+            <a:spAutoFit/>
+          </a:bodyPr>
+          <a:lstStyle/>
+          <a:p>
+            <a:pPr algn="ctr">
+              <a:spcAft>
+                <a:spcPts val="0"/>
+              </a:spcAft>
+            </a:pPr>
+            <a:r>
+              <a:rPr sz="1050" b="0" i="0">
+                <a:solidFill>
+                  <a:srgbClr val="B4C7D2"/>
+                </a:solidFill>
+                <a:latin typeface="Arial"/>
+              </a:rPr>
+              <a:t>0</a:t>
+            </a:r>
+          </a:p>
+        </p:txBody>
+      </p:sp>
+      <p:cxnSp>
+        <p:nvCxnSpPr>
+          <p:cNvPr id="8" name="C1-E34 line 6" descr="sci-ppt:o006"/>
+          <p:cNvCxnSpPr/>
+          <p:nvPr/>
+        </p:nvCxnSpPr>
+        <p:spPr>
+          <a:xfrm>
+            <a:off x="2697480" y="3840480"/>
+            <a:ext cx="0" cy="64008"/>
+          </a:xfrm>
+          <a:prstGeom prst="line">
+            <a:avLst/>
+          </a:prstGeom>
+          <a:ln w="12700">
+            <a:solidFill>
+              <a:srgbClr val="B4C7D2"/>
+            </a:solidFill>
+          </a:ln>
+          <a:effectLst/>
+        </p:spPr>
+      </p:cxnSp>
+      <p:cxnSp>
+        <p:nvCxnSpPr>
+          <p:cNvPr id="9" name="C1-E34 line 7" descr="sci-ppt:o007"/>
+          <p:cNvCxnSpPr/>
+          <p:nvPr/>
+        </p:nvCxnSpPr>
+        <p:spPr>
+          <a:xfrm>
+            <a:off x="2697480" y="1554480"/>
+            <a:ext cx="0" cy="2286000"/>
+          </a:xfrm>
+          <a:prstGeom prst="line">
+            <a:avLst/>
+          </a:prstGeom>
+          <a:ln w="7620">
+            <a:solidFill>
+              <a:srgbClr val="2E4756"/>
+            </a:solidFill>
+          </a:ln>
+          <a:effectLst/>
+        </p:spPr>
+      </p:cxnSp>
+      <p:sp>
+        <p:nvSpPr>
+          <p:cNvPr id="10" name="C1-E34 text 8" descr="sci-ppt:o008"/>
+          <p:cNvSpPr txBox="1"/>
+          <p:nvPr/>
+        </p:nvSpPr>
+        <p:spPr>
+          <a:xfrm>
+            <a:off x="2240280" y="3922776"/>
+            <a:ext cx="914400" cy="208407"/>
+          </a:xfrm>
+          <a:prstGeom prst="rect">
+            <a:avLst/>
+          </a:prstGeom>
+          <a:noFill/>
+          <a:effectLst/>
+        </p:spPr>
+        <p:txBody>
+          <a:bodyPr wrap="none" lIns="18288" rIns="18288" tIns="18288" bIns="18288" anchor="t">
+            <a:spAutoFit/>
+          </a:bodyPr>
+          <a:lstStyle/>
+          <a:p>
+            <a:pPr algn="ctr">
+              <a:spcAft>
+                <a:spcPts val="0"/>
+              </a:spcAft>
+            </a:pPr>
+            <a:r>
+              <a:rPr sz="1050" b="0" i="0">
+                <a:solidFill>
+                  <a:srgbClr val="B4C7D2"/>
+                </a:solidFill>
+                <a:latin typeface="Arial"/>
+              </a:rPr>
+              <a:t>1</a:t>
+            </a:r>
+          </a:p>
+        </p:txBody>
+      </p:sp>
+      <p:cxnSp>
+        <p:nvCxnSpPr>
+          <p:cNvPr id="11" name="C1-E34 line 9" descr="sci-ppt:o009"/>
+          <p:cNvCxnSpPr/>
+          <p:nvPr/>
+        </p:nvCxnSpPr>
+        <p:spPr>
+          <a:xfrm>
+            <a:off x="4480560" y="3840480"/>
+            <a:ext cx="0" cy="64008"/>
+          </a:xfrm>
+          <a:prstGeom prst="line">
+            <a:avLst/>
+          </a:prstGeom>
+          <a:ln w="12700">
+            <a:solidFill>
+              <a:srgbClr val="B4C7D2"/>
+            </a:solidFill>
+          </a:ln>
+          <a:effectLst/>
+        </p:spPr>
+      </p:cxnSp>
+      <p:cxnSp>
+        <p:nvCxnSpPr>
+          <p:cNvPr id="12" name="C1-E34 line 10" descr="sci-ppt:o010"/>
+          <p:cNvCxnSpPr/>
+          <p:nvPr/>
+        </p:nvCxnSpPr>
+        <p:spPr>
+          <a:xfrm>
+            <a:off x="4480560" y="1554480"/>
+            <a:ext cx="0" cy="2286000"/>
+          </a:xfrm>
+          <a:prstGeom prst="line">
+            <a:avLst/>
+          </a:prstGeom>
+          <a:ln w="7620">
+            <a:solidFill>
+              <a:srgbClr val="2E4756"/>
+            </a:solidFill>
+          </a:ln>
+          <a:effectLst/>
+        </p:spPr>
+      </p:cxnSp>
+      <p:sp>
+        <p:nvSpPr>
+          <p:cNvPr id="13" name="C1-E34 text 11" descr="sci-ppt:o011"/>
+          <p:cNvSpPr txBox="1"/>
+          <p:nvPr/>
+        </p:nvSpPr>
+        <p:spPr>
+          <a:xfrm>
+            <a:off x="4023360" y="3922776"/>
+            <a:ext cx="914400" cy="208407"/>
+          </a:xfrm>
+          <a:prstGeom prst="rect">
+            <a:avLst/>
+          </a:prstGeom>
+          <a:noFill/>
+          <a:effectLst/>
+        </p:spPr>
+        <p:txBody>
+          <a:bodyPr wrap="none" lIns="18288" rIns="18288" tIns="18288" bIns="18288" anchor="t">
+            <a:spAutoFit/>
+          </a:bodyPr>
+          <a:lstStyle/>
+          <a:p>
+            <a:pPr algn="ctr">
+              <a:spcAft>
+                <a:spcPts val="0"/>
+              </a:spcAft>
+            </a:pPr>
+            <a:r>
+              <a:rPr sz="1050" b="0" i="0">
+                <a:solidFill>
+                  <a:srgbClr val="B4C7D2"/>
+                </a:solidFill>
+                <a:latin typeface="Arial"/>
+              </a:rPr>
+              <a:t>2</a:t>
+            </a:r>
+          </a:p>
+        </p:txBody>
+      </p:sp>
+      <p:cxnSp>
+        <p:nvCxnSpPr>
+          <p:cNvPr id="14" name="C1-E34 line 12" descr="sci-ppt:o012"/>
+          <p:cNvCxnSpPr/>
+          <p:nvPr/>
+        </p:nvCxnSpPr>
+        <p:spPr>
+          <a:xfrm>
+            <a:off x="850392" y="3840480"/>
+            <a:ext cx="64008" cy="0"/>
+          </a:xfrm>
+          <a:prstGeom prst="line">
+            <a:avLst/>
+          </a:prstGeom>
+          <a:ln w="12700">
+            <a:solidFill>
+              <a:srgbClr val="B4C7D2"/>
+            </a:solidFill>
+          </a:ln>
+          <a:effectLst/>
+        </p:spPr>
+      </p:cxnSp>
+      <p:cxnSp>
+        <p:nvCxnSpPr>
+          <p:cNvPr id="15" name="C1-E34 line 13" descr="sci-ppt:o013"/>
+          <p:cNvCxnSpPr/>
+          <p:nvPr/>
+        </p:nvCxnSpPr>
+        <p:spPr>
+          <a:xfrm>
+            <a:off x="850392" y="2926080"/>
+            <a:ext cx="64008" cy="0"/>
+          </a:xfrm>
+          <a:prstGeom prst="line">
+            <a:avLst/>
+          </a:prstGeom>
+          <a:ln w="12700">
+            <a:solidFill>
+              <a:srgbClr val="B4C7D2"/>
+            </a:solidFill>
+          </a:ln>
+          <a:effectLst/>
+        </p:spPr>
+      </p:cxnSp>
+      <p:cxnSp>
+        <p:nvCxnSpPr>
+          <p:cNvPr id="16" name="C1-E34 line 14" descr="sci-ppt:o014"/>
+          <p:cNvCxnSpPr/>
+          <p:nvPr/>
+        </p:nvCxnSpPr>
+        <p:spPr>
+          <a:xfrm>
+            <a:off x="914400" y="2926080"/>
+            <a:ext cx="3566160" cy="0"/>
+          </a:xfrm>
+          <a:prstGeom prst="line">
+            <a:avLst/>
+          </a:prstGeom>
+          <a:ln w="7620">
+            <a:solidFill>
+              <a:srgbClr val="2E4756"/>
+            </a:solidFill>
+          </a:ln>
+          <a:effectLst/>
+        </p:spPr>
+      </p:cxnSp>
+      <p:sp>
+        <p:nvSpPr>
+          <p:cNvPr id="17" name="C1-E34 text 15" descr="sci-ppt:o015"/>
+          <p:cNvSpPr txBox="1"/>
+          <p:nvPr/>
+        </p:nvSpPr>
+        <p:spPr>
+          <a:xfrm>
+            <a:off x="45720" y="2843784"/>
+            <a:ext cx="777240" cy="208407"/>
+          </a:xfrm>
+          <a:prstGeom prst="rect">
+            <a:avLst/>
+          </a:prstGeom>
+          <a:noFill/>
+          <a:effectLst/>
+        </p:spPr>
+        <p:txBody>
+          <a:bodyPr wrap="none" lIns="18288" rIns="18288" tIns="18288" bIns="18288" anchor="t">
+            <a:spAutoFit/>
+          </a:bodyPr>
+          <a:lstStyle/>
+          <a:p>
+            <a:pPr algn="r">
+              <a:spcAft>
+                <a:spcPts val="0"/>
+              </a:spcAft>
+            </a:pPr>
+            <a:r>
+              <a:rPr sz="1050" b="0" i="0">
+                <a:solidFill>
+                  <a:srgbClr val="B4C7D2"/>
+                </a:solidFill>
+                <a:latin typeface="Arial"/>
+              </a:rPr>
+              <a:t>0.3</a:t>
+            </a:r>
+          </a:p>
+        </p:txBody>
+      </p:sp>
+      <p:cxnSp>
+        <p:nvCxnSpPr>
+          <p:cNvPr id="18" name="C1-E34 line 16" descr="sci-ppt:o016"/>
+          <p:cNvCxnSpPr/>
+          <p:nvPr/>
+        </p:nvCxnSpPr>
+        <p:spPr>
+          <a:xfrm>
+            <a:off x="850392" y="2011680"/>
+            <a:ext cx="64008" cy="0"/>
+          </a:xfrm>
+          <a:prstGeom prst="line">
+            <a:avLst/>
+          </a:prstGeom>
+          <a:ln w="12700">
+            <a:solidFill>
+              <a:srgbClr val="B4C7D2"/>
+            </a:solidFill>
+          </a:ln>
+          <a:effectLst/>
+        </p:spPr>
+      </p:cxnSp>
+      <p:cxnSp>
+        <p:nvCxnSpPr>
+          <p:cNvPr id="19" name="C1-E34 line 17" descr="sci-ppt:o017"/>
+          <p:cNvCxnSpPr/>
+          <p:nvPr/>
+        </p:nvCxnSpPr>
+        <p:spPr>
+          <a:xfrm>
+            <a:off x="914400" y="2011680"/>
+            <a:ext cx="3566160" cy="0"/>
+          </a:xfrm>
+          <a:prstGeom prst="line">
+            <a:avLst/>
+          </a:prstGeom>
+          <a:ln w="7620">
+            <a:solidFill>
+              <a:srgbClr val="2E4756"/>
+            </a:solidFill>
+          </a:ln>
+          <a:effectLst/>
+        </p:spPr>
+      </p:cxnSp>
+      <p:sp>
+        <p:nvSpPr>
+          <p:cNvPr id="20" name="C1-E34 text 18" descr="sci-ppt:o018"/>
+          <p:cNvSpPr txBox="1"/>
+          <p:nvPr/>
+        </p:nvSpPr>
+        <p:spPr>
+          <a:xfrm>
+            <a:off x="45720" y="1929384"/>
+            <a:ext cx="777240" cy="208407"/>
+          </a:xfrm>
+          <a:prstGeom prst="rect">
+            <a:avLst/>
+          </a:prstGeom>
+          <a:noFill/>
+          <a:effectLst/>
+        </p:spPr>
+        <p:txBody>
+          <a:bodyPr wrap="none" lIns="18288" rIns="18288" tIns="18288" bIns="18288" anchor="t">
+            <a:spAutoFit/>
+          </a:bodyPr>
+          <a:lstStyle/>
+          <a:p>
+            <a:pPr algn="r">
+              <a:spcAft>
+                <a:spcPts val="0"/>
+              </a:spcAft>
+            </a:pPr>
+            <a:r>
+              <a:rPr sz="1050" b="0" i="0">
+                <a:solidFill>
+                  <a:srgbClr val="B4C7D2"/>
+                </a:solidFill>
+                <a:latin typeface="Arial"/>
+              </a:rPr>
+              <a:t>0.6</a:t>
+            </a:r>
+          </a:p>
+        </p:txBody>
+      </p:sp>
+      <p:sp>
+        <p:nvSpPr>
+          <p:cNvPr id="21" name="C1-E34 text 19" descr="sci-ppt:o019"/>
+          <p:cNvSpPr txBox="1"/>
+          <p:nvPr/>
+        </p:nvSpPr>
+        <p:spPr>
+          <a:xfrm>
+            <a:off x="914400" y="4123944"/>
+            <a:ext cx="3566160" cy="231648"/>
+          </a:xfrm>
+          <a:prstGeom prst="rect">
+            <a:avLst/>
+          </a:prstGeom>
+          <a:noFill/>
+          <a:effectLst/>
+        </p:spPr>
+        <p:txBody>
+          <a:bodyPr wrap="none" lIns="18288" rIns="18288" tIns="18288" bIns="18288" anchor="t">
+            <a:spAutoFit/>
+          </a:bodyPr>
+          <a:lstStyle/>
+          <a:p>
+            <a:pPr algn="ctr">
+              <a:spcAft>
+                <a:spcPts val="0"/>
+              </a:spcAft>
+            </a:pPr>
+            <a:r>
+              <a:rPr sz="1200" b="0" i="0">
+                <a:solidFill>
+                  <a:srgbClr val="E7F0F3"/>
+                </a:solidFill>
+                <a:latin typeface="Arial"/>
+              </a:rPr>
+              <a:t>t (µs)</a:t>
+            </a:r>
+          </a:p>
+        </p:txBody>
+      </p:sp>
+      <p:sp>
+        <p:nvSpPr>
+          <p:cNvPr id="22" name="C1-E34 text 20" descr="sci-ppt:o020"/>
+          <p:cNvSpPr txBox="1"/>
+          <p:nvPr/>
+        </p:nvSpPr>
+        <p:spPr>
+          <a:xfrm>
+            <a:off x="365760" y="1207007"/>
+            <a:ext cx="3566160" cy="231648"/>
+          </a:xfrm>
+          <a:prstGeom prst="rect">
+            <a:avLst/>
+          </a:prstGeom>
+          <a:noFill/>
+          <a:effectLst/>
+        </p:spPr>
+        <p:txBody>
+          <a:bodyPr wrap="none" lIns="18288" rIns="18288" tIns="18288" bIns="18288" anchor="t">
+            <a:spAutoFit/>
+          </a:bodyPr>
+          <a:lstStyle/>
+          <a:p>
+            <a:pPr algn="l">
+              <a:spcAft>
+                <a:spcPts val="0"/>
+              </a:spcAft>
+            </a:pPr>
+            <a:r>
+              <a:rPr sz="1200" b="0" i="0">
+                <a:solidFill>
+                  <a:srgbClr val="E7F0F3"/>
+                </a:solidFill>
+                <a:latin typeface="Arial"/>
+              </a:rPr>
+              <a:t>p − p_ref (MPa)</a:t>
+            </a:r>
+          </a:p>
+        </p:txBody>
+      </p:sp>
+      <p:sp>
+        <p:nvSpPr>
+          <p:cNvPr id="23" name="C1-E34 polygon 21" descr="sci-ppt:o021"/>
+          <p:cNvSpPr/>
+          <p:nvPr/>
+        </p:nvSpPr>
+        <p:spPr>
+          <a:xfrm>
+            <a:off x="914400" y="2011680"/>
+            <a:ext cx="3566160" cy="1828800"/>
+          </a:xfrm>
+          <a:custGeom>
+            <a:avLst/>
+            <a:gdLst/>
+            <a:ahLst/>
+            <a:cxnLst/>
+            <a:rect l="l" t="t" r="r" b="b"/>
+            <a:pathLst>
+              <a:path w="3566160" h="1828800">
+                <a:moveTo>
+                  <a:pt x="0" y="0"/>
+                </a:moveTo>
+                <a:lnTo>
+                  <a:pt x="8937" y="0"/>
+                </a:lnTo>
+                <a:lnTo>
+                  <a:pt x="17875" y="0"/>
+                </a:lnTo>
+                <a:lnTo>
+                  <a:pt x="26813" y="0"/>
+                </a:lnTo>
+                <a:lnTo>
+                  <a:pt x="35750" y="0"/>
+                </a:lnTo>
+                <a:lnTo>
+                  <a:pt x="44688" y="0"/>
+                </a:lnTo>
+                <a:lnTo>
+                  <a:pt x="53626" y="0"/>
+                </a:lnTo>
+                <a:lnTo>
+                  <a:pt x="62564" y="0"/>
+                </a:lnTo>
+                <a:lnTo>
+                  <a:pt x="71501" y="0"/>
+                </a:lnTo>
+                <a:lnTo>
+                  <a:pt x="80439" y="0"/>
+                </a:lnTo>
+                <a:lnTo>
+                  <a:pt x="89377" y="0"/>
+                </a:lnTo>
+                <a:lnTo>
+                  <a:pt x="98315" y="0"/>
+                </a:lnTo>
+                <a:lnTo>
+                  <a:pt x="107252" y="0"/>
+                </a:lnTo>
+                <a:lnTo>
+                  <a:pt x="116190" y="0"/>
+                </a:lnTo>
+                <a:lnTo>
+                  <a:pt x="125128" y="0"/>
+                </a:lnTo>
+                <a:lnTo>
+                  <a:pt x="134066" y="0"/>
+                </a:lnTo>
+                <a:lnTo>
+                  <a:pt x="143003" y="0"/>
+                </a:lnTo>
+                <a:lnTo>
+                  <a:pt x="151941" y="0"/>
+                </a:lnTo>
+                <a:lnTo>
+                  <a:pt x="160879" y="0"/>
+                </a:lnTo>
+                <a:lnTo>
+                  <a:pt x="169817" y="0"/>
+                </a:lnTo>
+                <a:lnTo>
+                  <a:pt x="178754" y="0"/>
+                </a:lnTo>
+                <a:lnTo>
+                  <a:pt x="187692" y="0"/>
+                </a:lnTo>
+                <a:lnTo>
+                  <a:pt x="196630" y="0"/>
+                </a:lnTo>
+                <a:lnTo>
+                  <a:pt x="205568" y="0"/>
+                </a:lnTo>
+                <a:lnTo>
+                  <a:pt x="214505" y="0"/>
+                </a:lnTo>
+                <a:lnTo>
+                  <a:pt x="223443" y="0"/>
+                </a:lnTo>
+                <a:lnTo>
+                  <a:pt x="232381" y="0"/>
+                </a:lnTo>
+                <a:lnTo>
+                  <a:pt x="241319" y="0"/>
+                </a:lnTo>
+                <a:lnTo>
+                  <a:pt x="250256" y="0"/>
+                </a:lnTo>
+                <a:lnTo>
+                  <a:pt x="259194" y="0"/>
+                </a:lnTo>
+                <a:lnTo>
+                  <a:pt x="268132" y="0"/>
+                </a:lnTo>
+                <a:lnTo>
+                  <a:pt x="277070" y="0"/>
+                </a:lnTo>
+                <a:lnTo>
+                  <a:pt x="286007" y="0"/>
+                </a:lnTo>
+                <a:lnTo>
+                  <a:pt x="294945" y="0"/>
+                </a:lnTo>
+                <a:lnTo>
+                  <a:pt x="303883" y="0"/>
+                </a:lnTo>
+                <a:lnTo>
+                  <a:pt x="312821" y="0"/>
+                </a:lnTo>
+                <a:lnTo>
+                  <a:pt x="321758" y="0"/>
+                </a:lnTo>
+                <a:lnTo>
+                  <a:pt x="330696" y="0"/>
+                </a:lnTo>
+                <a:lnTo>
+                  <a:pt x="339634" y="0"/>
+                </a:lnTo>
+                <a:lnTo>
+                  <a:pt x="348572" y="0"/>
+                </a:lnTo>
+                <a:lnTo>
+                  <a:pt x="357509" y="0"/>
+                </a:lnTo>
+                <a:lnTo>
+                  <a:pt x="366447" y="0"/>
+                </a:lnTo>
+                <a:lnTo>
+                  <a:pt x="375385" y="0"/>
+                </a:lnTo>
+                <a:lnTo>
+                  <a:pt x="384323" y="0"/>
+                </a:lnTo>
+                <a:lnTo>
+                  <a:pt x="393260" y="0"/>
+                </a:lnTo>
+                <a:lnTo>
+                  <a:pt x="402198" y="0"/>
+                </a:lnTo>
+                <a:lnTo>
+                  <a:pt x="411136" y="0"/>
+                </a:lnTo>
+                <a:lnTo>
+                  <a:pt x="420073" y="0"/>
+                </a:lnTo>
+                <a:lnTo>
+                  <a:pt x="429011" y="0"/>
+                </a:lnTo>
+                <a:lnTo>
+                  <a:pt x="437949" y="0"/>
+                </a:lnTo>
+                <a:lnTo>
+                  <a:pt x="446887" y="0"/>
+                </a:lnTo>
+                <a:lnTo>
+                  <a:pt x="455824" y="0"/>
+                </a:lnTo>
+                <a:lnTo>
+                  <a:pt x="464762" y="0"/>
+                </a:lnTo>
+                <a:lnTo>
+                  <a:pt x="473700" y="0"/>
+                </a:lnTo>
+                <a:lnTo>
+                  <a:pt x="482638" y="0"/>
+                </a:lnTo>
+                <a:lnTo>
+                  <a:pt x="491575" y="0"/>
+                </a:lnTo>
+                <a:lnTo>
+                  <a:pt x="500513" y="0"/>
+                </a:lnTo>
+                <a:lnTo>
+                  <a:pt x="509451" y="0"/>
+                </a:lnTo>
+                <a:lnTo>
+                  <a:pt x="518389" y="0"/>
+                </a:lnTo>
+                <a:lnTo>
+                  <a:pt x="527326" y="0"/>
+                </a:lnTo>
+                <a:lnTo>
+                  <a:pt x="536264" y="0"/>
+                </a:lnTo>
+                <a:lnTo>
+                  <a:pt x="545202" y="0"/>
+                </a:lnTo>
+                <a:lnTo>
+                  <a:pt x="554140" y="0"/>
+                </a:lnTo>
+                <a:lnTo>
+                  <a:pt x="563077" y="0"/>
+                </a:lnTo>
+                <a:lnTo>
+                  <a:pt x="572015" y="0"/>
+                </a:lnTo>
+                <a:lnTo>
+                  <a:pt x="580953" y="0"/>
+                </a:lnTo>
+                <a:lnTo>
+                  <a:pt x="589891" y="0"/>
+                </a:lnTo>
+                <a:lnTo>
+                  <a:pt x="598828" y="0"/>
+                </a:lnTo>
+                <a:lnTo>
+                  <a:pt x="607766" y="0"/>
+                </a:lnTo>
+                <a:lnTo>
+                  <a:pt x="616704" y="0"/>
+                </a:lnTo>
+                <a:lnTo>
+                  <a:pt x="625642" y="0"/>
+                </a:lnTo>
+                <a:lnTo>
+                  <a:pt x="634579" y="0"/>
+                </a:lnTo>
+                <a:lnTo>
+                  <a:pt x="643517" y="0"/>
+                </a:lnTo>
+                <a:lnTo>
+                  <a:pt x="652455" y="0"/>
+                </a:lnTo>
+                <a:lnTo>
+                  <a:pt x="661393" y="0"/>
+                </a:lnTo>
+                <a:lnTo>
+                  <a:pt x="670330" y="0"/>
+                </a:lnTo>
+                <a:lnTo>
+                  <a:pt x="679268" y="0"/>
+                </a:lnTo>
+                <a:lnTo>
+                  <a:pt x="688206" y="0"/>
+                </a:lnTo>
+                <a:lnTo>
+                  <a:pt x="697144" y="0"/>
+                </a:lnTo>
+                <a:lnTo>
+                  <a:pt x="706081" y="0"/>
+                </a:lnTo>
+                <a:lnTo>
+                  <a:pt x="715019" y="0"/>
+                </a:lnTo>
+                <a:lnTo>
+                  <a:pt x="723957" y="0"/>
+                </a:lnTo>
+                <a:lnTo>
+                  <a:pt x="732895" y="0"/>
+                </a:lnTo>
+                <a:lnTo>
+                  <a:pt x="741832" y="0"/>
+                </a:lnTo>
+                <a:lnTo>
+                  <a:pt x="750770" y="0"/>
+                </a:lnTo>
+                <a:lnTo>
+                  <a:pt x="759708" y="0"/>
+                </a:lnTo>
+                <a:lnTo>
+                  <a:pt x="768646" y="0"/>
+                </a:lnTo>
+                <a:lnTo>
+                  <a:pt x="777583" y="0"/>
+                </a:lnTo>
+                <a:lnTo>
+                  <a:pt x="786521" y="0"/>
+                </a:lnTo>
+                <a:lnTo>
+                  <a:pt x="795459" y="0"/>
+                </a:lnTo>
+                <a:lnTo>
+                  <a:pt x="804396" y="0"/>
+                </a:lnTo>
+                <a:lnTo>
+                  <a:pt x="813334" y="0"/>
+                </a:lnTo>
+                <a:lnTo>
+                  <a:pt x="822272" y="0"/>
+                </a:lnTo>
+                <a:lnTo>
+                  <a:pt x="831210" y="0"/>
+                </a:lnTo>
+                <a:lnTo>
+                  <a:pt x="840147" y="0"/>
+                </a:lnTo>
+                <a:lnTo>
+                  <a:pt x="849085" y="0"/>
+                </a:lnTo>
+                <a:lnTo>
+                  <a:pt x="858023" y="0"/>
+                </a:lnTo>
+                <a:lnTo>
+                  <a:pt x="866961" y="0"/>
+                </a:lnTo>
+                <a:lnTo>
+                  <a:pt x="875898" y="0"/>
+                </a:lnTo>
+                <a:lnTo>
+                  <a:pt x="884836" y="0"/>
+                </a:lnTo>
+                <a:lnTo>
+                  <a:pt x="893774" y="1828800"/>
+                </a:lnTo>
+                <a:lnTo>
+                  <a:pt x="902712" y="1828800"/>
+                </a:lnTo>
+                <a:lnTo>
+                  <a:pt x="911649" y="1828800"/>
+                </a:lnTo>
+                <a:lnTo>
+                  <a:pt x="920587" y="1828800"/>
+                </a:lnTo>
+                <a:lnTo>
+                  <a:pt x="929525" y="1828800"/>
+                </a:lnTo>
+                <a:lnTo>
+                  <a:pt x="938463" y="1828800"/>
+                </a:lnTo>
+                <a:lnTo>
+                  <a:pt x="947400" y="1828800"/>
+                </a:lnTo>
+                <a:lnTo>
+                  <a:pt x="956338" y="1828800"/>
+                </a:lnTo>
+                <a:lnTo>
+                  <a:pt x="965276" y="1828800"/>
+                </a:lnTo>
+                <a:lnTo>
+                  <a:pt x="974214" y="1828800"/>
+                </a:lnTo>
+                <a:lnTo>
+                  <a:pt x="983151" y="1828800"/>
+                </a:lnTo>
+                <a:lnTo>
+                  <a:pt x="992089" y="1828800"/>
+                </a:lnTo>
+                <a:lnTo>
+                  <a:pt x="1001027" y="1828800"/>
+                </a:lnTo>
+                <a:lnTo>
+                  <a:pt x="1009965" y="1828800"/>
+                </a:lnTo>
+                <a:lnTo>
+                  <a:pt x="1018902" y="1828800"/>
+                </a:lnTo>
+                <a:lnTo>
+                  <a:pt x="1027840" y="1828800"/>
+                </a:lnTo>
+                <a:lnTo>
+                  <a:pt x="1036778" y="1828800"/>
+                </a:lnTo>
+                <a:lnTo>
+                  <a:pt x="1045716" y="1828800"/>
+                </a:lnTo>
+                <a:lnTo>
+                  <a:pt x="1054653" y="1828800"/>
+                </a:lnTo>
+                <a:lnTo>
+                  <a:pt x="1063591" y="1828800"/>
+                </a:lnTo>
+                <a:lnTo>
+                  <a:pt x="1072529" y="1828800"/>
+                </a:lnTo>
+                <a:lnTo>
+                  <a:pt x="1081467" y="1828800"/>
+                </a:lnTo>
+                <a:lnTo>
+                  <a:pt x="1090404" y="1828800"/>
+                </a:lnTo>
+                <a:lnTo>
+                  <a:pt x="1099342" y="1828800"/>
+                </a:lnTo>
+                <a:lnTo>
+                  <a:pt x="1108280" y="1828800"/>
+                </a:lnTo>
+                <a:lnTo>
+                  <a:pt x="1117218" y="1828800"/>
+                </a:lnTo>
+                <a:lnTo>
+                  <a:pt x="1126155" y="1828800"/>
+                </a:lnTo>
+                <a:lnTo>
+                  <a:pt x="1135093" y="1828800"/>
+                </a:lnTo>
+                <a:lnTo>
+                  <a:pt x="1144031" y="1828800"/>
+                </a:lnTo>
+                <a:lnTo>
+                  <a:pt x="1152969" y="1828800"/>
+                </a:lnTo>
+                <a:lnTo>
+                  <a:pt x="1161906" y="1828800"/>
+                </a:lnTo>
+                <a:lnTo>
+                  <a:pt x="1170844" y="1828800"/>
+                </a:lnTo>
+                <a:lnTo>
+                  <a:pt x="1179782" y="1828800"/>
+                </a:lnTo>
+                <a:lnTo>
+                  <a:pt x="1188720" y="1828800"/>
+                </a:lnTo>
+                <a:lnTo>
+                  <a:pt x="1197657" y="1828800"/>
+                </a:lnTo>
+                <a:lnTo>
+                  <a:pt x="1206595" y="1828800"/>
+                </a:lnTo>
+                <a:lnTo>
+                  <a:pt x="1215533" y="1828800"/>
+                </a:lnTo>
+                <a:lnTo>
+                  <a:pt x="1224470" y="1828800"/>
+                </a:lnTo>
+                <a:lnTo>
+                  <a:pt x="1233408" y="1828800"/>
+                </a:lnTo>
+                <a:lnTo>
+                  <a:pt x="1242346" y="1828800"/>
+                </a:lnTo>
+                <a:lnTo>
+                  <a:pt x="1251284" y="1828800"/>
+                </a:lnTo>
+                <a:lnTo>
+                  <a:pt x="1260221" y="1828800"/>
+                </a:lnTo>
+                <a:lnTo>
+                  <a:pt x="1269159" y="1828800"/>
+                </a:lnTo>
+                <a:lnTo>
+                  <a:pt x="1278097" y="1828800"/>
+                </a:lnTo>
+                <a:lnTo>
+                  <a:pt x="1287035" y="1828800"/>
+                </a:lnTo>
+                <a:lnTo>
+                  <a:pt x="1295972" y="1828800"/>
+                </a:lnTo>
+                <a:lnTo>
+                  <a:pt x="1304910" y="1828800"/>
+                </a:lnTo>
+                <a:lnTo>
+                  <a:pt x="1313848" y="1828800"/>
+                </a:lnTo>
+                <a:lnTo>
+                  <a:pt x="1322786" y="1828800"/>
+                </a:lnTo>
+                <a:lnTo>
+                  <a:pt x="1331723" y="1828800"/>
+                </a:lnTo>
+                <a:lnTo>
+                  <a:pt x="1340661" y="1828800"/>
+                </a:lnTo>
+                <a:lnTo>
+                  <a:pt x="1349599" y="1828800"/>
+                </a:lnTo>
+                <a:lnTo>
+                  <a:pt x="1358537" y="1828800"/>
+                </a:lnTo>
+                <a:lnTo>
+                  <a:pt x="1367474" y="1828800"/>
+                </a:lnTo>
+                <a:lnTo>
+                  <a:pt x="1376412" y="1828800"/>
+                </a:lnTo>
+                <a:lnTo>
+                  <a:pt x="1385350" y="1828800"/>
+                </a:lnTo>
+                <a:lnTo>
+                  <a:pt x="1394288" y="1828800"/>
+                </a:lnTo>
+                <a:lnTo>
+                  <a:pt x="1403225" y="1828800"/>
+                </a:lnTo>
+                <a:lnTo>
+                  <a:pt x="1412163" y="1828800"/>
+                </a:lnTo>
+                <a:lnTo>
+                  <a:pt x="1421101" y="1828800"/>
+                </a:lnTo>
+                <a:lnTo>
+                  <a:pt x="1430039" y="1828800"/>
+                </a:lnTo>
+                <a:lnTo>
+                  <a:pt x="1438976" y="1828800"/>
+                </a:lnTo>
+                <a:lnTo>
+                  <a:pt x="1447914" y="1828800"/>
+                </a:lnTo>
+                <a:lnTo>
+                  <a:pt x="1456852" y="1828800"/>
+                </a:lnTo>
+                <a:lnTo>
+                  <a:pt x="1465790" y="1828800"/>
+                </a:lnTo>
+                <a:lnTo>
+                  <a:pt x="1474727" y="1828800"/>
+                </a:lnTo>
+                <a:lnTo>
+                  <a:pt x="1483665" y="1828800"/>
+                </a:lnTo>
+                <a:lnTo>
+                  <a:pt x="1492603" y="1828800"/>
+                </a:lnTo>
+                <a:lnTo>
+                  <a:pt x="1501541" y="1828800"/>
+                </a:lnTo>
+                <a:lnTo>
+                  <a:pt x="1510478" y="1828800"/>
+                </a:lnTo>
+                <a:lnTo>
+                  <a:pt x="1519416" y="1828800"/>
+                </a:lnTo>
+                <a:lnTo>
+                  <a:pt x="1528354" y="1828800"/>
+                </a:lnTo>
+                <a:lnTo>
+                  <a:pt x="1537292" y="1828800"/>
+                </a:lnTo>
+                <a:lnTo>
+                  <a:pt x="1546229" y="1828800"/>
+                </a:lnTo>
+                <a:lnTo>
+                  <a:pt x="1555167" y="1828800"/>
+                </a:lnTo>
+                <a:lnTo>
+                  <a:pt x="1564105" y="1828800"/>
+                </a:lnTo>
+                <a:lnTo>
+                  <a:pt x="1573043" y="1828800"/>
+                </a:lnTo>
+                <a:lnTo>
+                  <a:pt x="1581980" y="1828800"/>
+                </a:lnTo>
+                <a:lnTo>
+                  <a:pt x="1590918" y="1828800"/>
+                </a:lnTo>
+                <a:lnTo>
+                  <a:pt x="1599856" y="1828800"/>
+                </a:lnTo>
+                <a:lnTo>
+                  <a:pt x="1608793" y="1828800"/>
+                </a:lnTo>
+                <a:lnTo>
+                  <a:pt x="1617731" y="1828800"/>
+                </a:lnTo>
+                <a:lnTo>
+                  <a:pt x="1626669" y="1828800"/>
+                </a:lnTo>
+                <a:lnTo>
+                  <a:pt x="1635607" y="1828800"/>
+                </a:lnTo>
+                <a:lnTo>
+                  <a:pt x="1644544" y="1828800"/>
+                </a:lnTo>
+                <a:lnTo>
+                  <a:pt x="1653482" y="1828800"/>
+                </a:lnTo>
+                <a:lnTo>
+                  <a:pt x="1662420" y="1828800"/>
+                </a:lnTo>
+                <a:lnTo>
+                  <a:pt x="1671358" y="1828800"/>
+                </a:lnTo>
+                <a:lnTo>
+                  <a:pt x="1680295" y="1828800"/>
+                </a:lnTo>
+                <a:lnTo>
+                  <a:pt x="1689233" y="1828800"/>
+                </a:lnTo>
+                <a:lnTo>
+                  <a:pt x="1698171" y="1828800"/>
+                </a:lnTo>
+                <a:lnTo>
+                  <a:pt x="1707109" y="1828800"/>
+                </a:lnTo>
+                <a:lnTo>
+                  <a:pt x="1716046" y="1828800"/>
+                </a:lnTo>
+                <a:lnTo>
+                  <a:pt x="1724984" y="1828800"/>
+                </a:lnTo>
+                <a:lnTo>
+                  <a:pt x="1733922" y="1828800"/>
+                </a:lnTo>
+                <a:lnTo>
+                  <a:pt x="1742860" y="1828800"/>
+                </a:lnTo>
+                <a:lnTo>
+                  <a:pt x="1751797" y="1828800"/>
+                </a:lnTo>
+                <a:lnTo>
+                  <a:pt x="1760735" y="1828800"/>
+                </a:lnTo>
+                <a:lnTo>
+                  <a:pt x="1769673" y="1828800"/>
+                </a:lnTo>
+                <a:lnTo>
+                  <a:pt x="1778611" y="1828800"/>
+                </a:lnTo>
+                <a:lnTo>
+                  <a:pt x="1787548" y="1828800"/>
+                </a:lnTo>
+                <a:lnTo>
+                  <a:pt x="1796486" y="1828800"/>
+                </a:lnTo>
+                <a:lnTo>
+                  <a:pt x="1805424" y="1828800"/>
+                </a:lnTo>
+                <a:lnTo>
+                  <a:pt x="1814362" y="1828800"/>
+                </a:lnTo>
+                <a:lnTo>
+                  <a:pt x="1823299" y="1828800"/>
+                </a:lnTo>
+                <a:lnTo>
+                  <a:pt x="1832237" y="1828800"/>
+                </a:lnTo>
+                <a:lnTo>
+                  <a:pt x="1841175" y="1828800"/>
+                </a:lnTo>
+                <a:lnTo>
+                  <a:pt x="1850113" y="1828800"/>
+                </a:lnTo>
+                <a:lnTo>
+                  <a:pt x="1859050" y="1828800"/>
+                </a:lnTo>
+                <a:lnTo>
+                  <a:pt x="1867988" y="1828800"/>
+                </a:lnTo>
+                <a:lnTo>
+                  <a:pt x="1876926" y="1828800"/>
+                </a:lnTo>
+                <a:lnTo>
+                  <a:pt x="1885864" y="1828800"/>
+                </a:lnTo>
+                <a:lnTo>
+                  <a:pt x="1894801" y="1828800"/>
+                </a:lnTo>
+                <a:lnTo>
+                  <a:pt x="1903739" y="1828800"/>
+                </a:lnTo>
+                <a:lnTo>
+                  <a:pt x="1912677" y="1828800"/>
+                </a:lnTo>
+                <a:lnTo>
+                  <a:pt x="1921615" y="1828800"/>
+                </a:lnTo>
+                <a:lnTo>
+                  <a:pt x="1930552" y="1828800"/>
+                </a:lnTo>
+                <a:lnTo>
+                  <a:pt x="1939490" y="1828800"/>
+                </a:lnTo>
+                <a:lnTo>
+                  <a:pt x="1948428" y="1828800"/>
+                </a:lnTo>
+                <a:lnTo>
+                  <a:pt x="1957366" y="1828800"/>
+                </a:lnTo>
+                <a:lnTo>
+                  <a:pt x="1966303" y="1828800"/>
+                </a:lnTo>
+                <a:lnTo>
+                  <a:pt x="1975241" y="1828800"/>
+                </a:lnTo>
+                <a:lnTo>
+                  <a:pt x="1984179" y="1828800"/>
+                </a:lnTo>
+                <a:lnTo>
+                  <a:pt x="1993116" y="1828800"/>
+                </a:lnTo>
+                <a:lnTo>
+                  <a:pt x="2002054" y="1828800"/>
+                </a:lnTo>
+                <a:lnTo>
+                  <a:pt x="2010992" y="1828800"/>
+                </a:lnTo>
+                <a:lnTo>
+                  <a:pt x="2019930" y="1828800"/>
+                </a:lnTo>
+                <a:lnTo>
+                  <a:pt x="2028867" y="1828800"/>
+                </a:lnTo>
+                <a:lnTo>
+                  <a:pt x="2037805" y="1828800"/>
+                </a:lnTo>
+                <a:lnTo>
+                  <a:pt x="2046743" y="1828800"/>
+                </a:lnTo>
+                <a:lnTo>
+                  <a:pt x="2055681" y="1828800"/>
+                </a:lnTo>
+                <a:lnTo>
+                  <a:pt x="2064618" y="1828800"/>
+                </a:lnTo>
+                <a:lnTo>
+                  <a:pt x="2073556" y="1828800"/>
+                </a:lnTo>
+                <a:lnTo>
+                  <a:pt x="2082494" y="1828800"/>
+                </a:lnTo>
+                <a:lnTo>
+                  <a:pt x="2091432" y="1828800"/>
+                </a:lnTo>
+                <a:lnTo>
+                  <a:pt x="2100369" y="1828800"/>
+                </a:lnTo>
+                <a:lnTo>
+                  <a:pt x="2109307" y="1828800"/>
+                </a:lnTo>
+                <a:lnTo>
+                  <a:pt x="2118245" y="1828800"/>
+                </a:lnTo>
+                <a:lnTo>
+                  <a:pt x="2127183" y="1828800"/>
+                </a:lnTo>
+                <a:lnTo>
+                  <a:pt x="2136120" y="1828800"/>
+                </a:lnTo>
+                <a:lnTo>
+                  <a:pt x="2145058" y="1828800"/>
+                </a:lnTo>
+                <a:lnTo>
+                  <a:pt x="2153996" y="1828800"/>
+                </a:lnTo>
+                <a:lnTo>
+                  <a:pt x="2162934" y="1828800"/>
+                </a:lnTo>
+                <a:lnTo>
+                  <a:pt x="2171871" y="1828800"/>
+                </a:lnTo>
+                <a:lnTo>
+                  <a:pt x="2180809" y="1828800"/>
+                </a:lnTo>
+                <a:lnTo>
+                  <a:pt x="2189747" y="1828800"/>
+                </a:lnTo>
+                <a:lnTo>
+                  <a:pt x="2198685" y="1828800"/>
+                </a:lnTo>
+                <a:lnTo>
+                  <a:pt x="2207622" y="1828800"/>
+                </a:lnTo>
+                <a:lnTo>
+                  <a:pt x="2216560" y="1828800"/>
+                </a:lnTo>
+                <a:lnTo>
+                  <a:pt x="2225498" y="1828800"/>
+                </a:lnTo>
+                <a:lnTo>
+                  <a:pt x="2234436" y="1828800"/>
+                </a:lnTo>
+                <a:lnTo>
+                  <a:pt x="2243373" y="1828800"/>
+                </a:lnTo>
+                <a:lnTo>
+                  <a:pt x="2252311" y="1828800"/>
+                </a:lnTo>
+                <a:lnTo>
+                  <a:pt x="2261249" y="1828800"/>
+                </a:lnTo>
+                <a:lnTo>
+                  <a:pt x="2270187" y="1828800"/>
+                </a:lnTo>
+                <a:lnTo>
+                  <a:pt x="2279124" y="1828800"/>
+                </a:lnTo>
+                <a:lnTo>
+                  <a:pt x="2288062" y="1828800"/>
+                </a:lnTo>
+                <a:lnTo>
+                  <a:pt x="2297000" y="1828800"/>
+                </a:lnTo>
+                <a:lnTo>
+                  <a:pt x="2305938" y="1828800"/>
+                </a:lnTo>
+                <a:lnTo>
+                  <a:pt x="2314875" y="1828800"/>
+                </a:lnTo>
+                <a:lnTo>
+                  <a:pt x="2323813" y="1828800"/>
+                </a:lnTo>
+                <a:lnTo>
+                  <a:pt x="2332751" y="1828800"/>
+                </a:lnTo>
+                <a:lnTo>
+                  <a:pt x="2341689" y="1828800"/>
+                </a:lnTo>
+                <a:lnTo>
+                  <a:pt x="2350626" y="1828800"/>
+                </a:lnTo>
+                <a:lnTo>
+                  <a:pt x="2359564" y="1828800"/>
+                </a:lnTo>
+                <a:lnTo>
+                  <a:pt x="2368502" y="1828800"/>
+                </a:lnTo>
+                <a:lnTo>
+                  <a:pt x="2377439" y="1828800"/>
+                </a:lnTo>
+                <a:lnTo>
+                  <a:pt x="2386377" y="1828800"/>
+                </a:lnTo>
+                <a:lnTo>
+                  <a:pt x="2395315" y="1828800"/>
+                </a:lnTo>
+                <a:lnTo>
+                  <a:pt x="2404253" y="1828800"/>
+                </a:lnTo>
+                <a:lnTo>
+                  <a:pt x="2413190" y="1828800"/>
+                </a:lnTo>
+                <a:lnTo>
+                  <a:pt x="2422128" y="1828800"/>
+                </a:lnTo>
+                <a:lnTo>
+                  <a:pt x="2431066" y="1828800"/>
+                </a:lnTo>
+                <a:lnTo>
+                  <a:pt x="2440004" y="1828800"/>
+                </a:lnTo>
+                <a:lnTo>
+                  <a:pt x="2448941" y="1828800"/>
+                </a:lnTo>
+                <a:lnTo>
+                  <a:pt x="2457879" y="1828800"/>
+                </a:lnTo>
+                <a:lnTo>
+                  <a:pt x="2466817" y="1828800"/>
+                </a:lnTo>
+                <a:lnTo>
+                  <a:pt x="2475755" y="1828800"/>
+                </a:lnTo>
+                <a:lnTo>
+                  <a:pt x="2484692" y="1828800"/>
+                </a:lnTo>
+                <a:lnTo>
+                  <a:pt x="2493630" y="1828800"/>
+                </a:lnTo>
+                <a:lnTo>
+                  <a:pt x="2502568" y="1828800"/>
+                </a:lnTo>
+                <a:lnTo>
+                  <a:pt x="2511506" y="1828800"/>
+                </a:lnTo>
+                <a:lnTo>
+                  <a:pt x="2520443" y="1828800"/>
+                </a:lnTo>
+                <a:lnTo>
+                  <a:pt x="2529381" y="1828800"/>
+                </a:lnTo>
+                <a:lnTo>
+                  <a:pt x="2538319" y="1828800"/>
+                </a:lnTo>
+                <a:lnTo>
+                  <a:pt x="2547257" y="1828800"/>
+                </a:lnTo>
+                <a:lnTo>
+                  <a:pt x="2556194" y="1828800"/>
+                </a:lnTo>
+                <a:lnTo>
+                  <a:pt x="2565132" y="1828800"/>
+                </a:lnTo>
+                <a:lnTo>
+                  <a:pt x="2574070" y="1828800"/>
+                </a:lnTo>
+                <a:lnTo>
+                  <a:pt x="2583008" y="1828800"/>
+                </a:lnTo>
+                <a:lnTo>
+                  <a:pt x="2591945" y="1828800"/>
+                </a:lnTo>
+                <a:lnTo>
+                  <a:pt x="2600883" y="1828800"/>
+                </a:lnTo>
+                <a:lnTo>
+                  <a:pt x="2609821" y="1828800"/>
+                </a:lnTo>
+                <a:lnTo>
+                  <a:pt x="2618759" y="1828800"/>
+                </a:lnTo>
+                <a:lnTo>
+                  <a:pt x="2627696" y="1828800"/>
+                </a:lnTo>
+                <a:lnTo>
+                  <a:pt x="2636634" y="1828800"/>
+                </a:lnTo>
+                <a:lnTo>
+                  <a:pt x="2645572" y="1828800"/>
+                </a:lnTo>
+                <a:lnTo>
+                  <a:pt x="2654510" y="1828800"/>
+                </a:lnTo>
+                <a:lnTo>
+                  <a:pt x="2663447" y="1828800"/>
+                </a:lnTo>
+                <a:lnTo>
+                  <a:pt x="2672385" y="1828800"/>
+                </a:lnTo>
+                <a:lnTo>
+                  <a:pt x="2681323" y="1828800"/>
+                </a:lnTo>
+                <a:lnTo>
+                  <a:pt x="2690261" y="1828800"/>
+                </a:lnTo>
+                <a:lnTo>
+                  <a:pt x="2699198" y="1828800"/>
+                </a:lnTo>
+                <a:lnTo>
+                  <a:pt x="2708136" y="1828800"/>
+                </a:lnTo>
+                <a:lnTo>
+                  <a:pt x="2717074" y="1828800"/>
+                </a:lnTo>
+                <a:lnTo>
+                  <a:pt x="2726012" y="1828800"/>
+                </a:lnTo>
+                <a:lnTo>
+                  <a:pt x="2734949" y="1828800"/>
+                </a:lnTo>
+                <a:lnTo>
+                  <a:pt x="2743887" y="1828800"/>
+                </a:lnTo>
+                <a:lnTo>
+                  <a:pt x="2752825" y="1828800"/>
+                </a:lnTo>
+                <a:lnTo>
+                  <a:pt x="2761763" y="1828800"/>
+                </a:lnTo>
+                <a:lnTo>
+                  <a:pt x="2770700" y="1828800"/>
+                </a:lnTo>
+                <a:lnTo>
+                  <a:pt x="2779638" y="1828800"/>
+                </a:lnTo>
+                <a:lnTo>
+                  <a:pt x="2788576" y="1828800"/>
+                </a:lnTo>
+                <a:lnTo>
+                  <a:pt x="2797513" y="1828800"/>
+                </a:lnTo>
+                <a:lnTo>
+                  <a:pt x="2806451" y="1828800"/>
+                </a:lnTo>
+                <a:lnTo>
+                  <a:pt x="2815389" y="1828800"/>
+                </a:lnTo>
+                <a:lnTo>
+                  <a:pt x="2824327" y="1828800"/>
+                </a:lnTo>
+                <a:lnTo>
+                  <a:pt x="2833264" y="1828800"/>
+                </a:lnTo>
+                <a:lnTo>
+                  <a:pt x="2842202" y="1828800"/>
+                </a:lnTo>
+                <a:lnTo>
+                  <a:pt x="2851140" y="1828800"/>
+                </a:lnTo>
+                <a:lnTo>
+                  <a:pt x="2860078" y="1828800"/>
+                </a:lnTo>
+                <a:lnTo>
+                  <a:pt x="2869015" y="1828800"/>
+                </a:lnTo>
+                <a:lnTo>
+                  <a:pt x="2877953" y="1828800"/>
+                </a:lnTo>
+                <a:lnTo>
+                  <a:pt x="2886891" y="1828800"/>
+                </a:lnTo>
+                <a:lnTo>
+                  <a:pt x="2895829" y="1828800"/>
+                </a:lnTo>
+                <a:lnTo>
+                  <a:pt x="2904766" y="1828800"/>
+                </a:lnTo>
+                <a:lnTo>
+                  <a:pt x="2913704" y="1828800"/>
+                </a:lnTo>
+                <a:lnTo>
+                  <a:pt x="2922642" y="1828800"/>
+                </a:lnTo>
+                <a:lnTo>
+                  <a:pt x="2931580" y="1828800"/>
+                </a:lnTo>
+                <a:lnTo>
+                  <a:pt x="2940517" y="1828800"/>
+                </a:lnTo>
+                <a:lnTo>
+                  <a:pt x="2949455" y="1828800"/>
+                </a:lnTo>
+                <a:lnTo>
+                  <a:pt x="2958393" y="1828800"/>
+                </a:lnTo>
+                <a:lnTo>
+                  <a:pt x="2967331" y="1828800"/>
+                </a:lnTo>
+                <a:lnTo>
+                  <a:pt x="2976268" y="1828800"/>
+                </a:lnTo>
+                <a:lnTo>
+                  <a:pt x="2985206" y="1828800"/>
+                </a:lnTo>
+                <a:lnTo>
+                  <a:pt x="2994144" y="1828800"/>
+                </a:lnTo>
+                <a:lnTo>
+                  <a:pt x="3003082" y="1828800"/>
+                </a:lnTo>
+                <a:lnTo>
+                  <a:pt x="3012019" y="1828800"/>
+                </a:lnTo>
+                <a:lnTo>
+                  <a:pt x="3020957" y="1828800"/>
+                </a:lnTo>
+                <a:lnTo>
+                  <a:pt x="3029895" y="1828800"/>
+                </a:lnTo>
+                <a:lnTo>
+                  <a:pt x="3038833" y="1828800"/>
+                </a:lnTo>
+                <a:lnTo>
+                  <a:pt x="3047770" y="1828800"/>
+                </a:lnTo>
+                <a:lnTo>
+                  <a:pt x="3056708" y="1828800"/>
+                </a:lnTo>
+                <a:lnTo>
+                  <a:pt x="3065646" y="1828800"/>
+                </a:lnTo>
+                <a:lnTo>
+                  <a:pt x="3074584" y="1828800"/>
+                </a:lnTo>
+                <a:lnTo>
+                  <a:pt x="3083521" y="1828800"/>
+                </a:lnTo>
+                <a:lnTo>
+                  <a:pt x="3092459" y="1828800"/>
+                </a:lnTo>
+                <a:lnTo>
+                  <a:pt x="3101397" y="1828800"/>
+                </a:lnTo>
+                <a:lnTo>
+                  <a:pt x="3110335" y="1828800"/>
+                </a:lnTo>
+                <a:lnTo>
+                  <a:pt x="3119272" y="1828800"/>
+                </a:lnTo>
+                <a:lnTo>
+                  <a:pt x="3128210" y="1828800"/>
+                </a:lnTo>
+                <a:lnTo>
+                  <a:pt x="3137148" y="1828800"/>
+                </a:lnTo>
+                <a:lnTo>
+                  <a:pt x="3146086" y="1828800"/>
+                </a:lnTo>
+                <a:lnTo>
+                  <a:pt x="3155023" y="1828800"/>
+                </a:lnTo>
+                <a:lnTo>
+                  <a:pt x="3163961" y="1828800"/>
+                </a:lnTo>
+                <a:lnTo>
+                  <a:pt x="3172899" y="1828800"/>
+                </a:lnTo>
+                <a:lnTo>
+                  <a:pt x="3181836" y="1828800"/>
+                </a:lnTo>
+                <a:lnTo>
+                  <a:pt x="3190774" y="1828800"/>
+                </a:lnTo>
+                <a:lnTo>
+                  <a:pt x="3199712" y="1828800"/>
+                </a:lnTo>
+                <a:lnTo>
+                  <a:pt x="3208650" y="1828800"/>
+                </a:lnTo>
+                <a:lnTo>
+                  <a:pt x="3217587" y="1828800"/>
+                </a:lnTo>
+                <a:lnTo>
+                  <a:pt x="3226525" y="1828800"/>
+                </a:lnTo>
+                <a:lnTo>
+                  <a:pt x="3235463" y="1828800"/>
+                </a:lnTo>
+                <a:lnTo>
+                  <a:pt x="3244401" y="1828800"/>
+                </a:lnTo>
+                <a:lnTo>
+                  <a:pt x="3253338" y="1828800"/>
+                </a:lnTo>
+                <a:lnTo>
+                  <a:pt x="3262276" y="1828800"/>
+                </a:lnTo>
+                <a:lnTo>
+                  <a:pt x="3271214" y="1828800"/>
+                </a:lnTo>
+                <a:lnTo>
+                  <a:pt x="3280152" y="1828800"/>
+                </a:lnTo>
+                <a:lnTo>
+                  <a:pt x="3289089" y="1828800"/>
+                </a:lnTo>
+                <a:lnTo>
+                  <a:pt x="3298027" y="1828800"/>
+                </a:lnTo>
+                <a:lnTo>
+                  <a:pt x="3306965" y="1828800"/>
+                </a:lnTo>
+                <a:lnTo>
+                  <a:pt x="3315903" y="1828800"/>
+                </a:lnTo>
+                <a:lnTo>
+                  <a:pt x="3324840" y="1828800"/>
+                </a:lnTo>
+                <a:lnTo>
+                  <a:pt x="3333778" y="1828800"/>
+                </a:lnTo>
+                <a:lnTo>
+                  <a:pt x="3342716" y="1828800"/>
+                </a:lnTo>
+                <a:lnTo>
+                  <a:pt x="3351654" y="1828800"/>
+                </a:lnTo>
+                <a:lnTo>
+                  <a:pt x="3360591" y="1828800"/>
+                </a:lnTo>
+                <a:lnTo>
+                  <a:pt x="3369529" y="1828800"/>
+                </a:lnTo>
+                <a:lnTo>
+                  <a:pt x="3378467" y="1828800"/>
+                </a:lnTo>
+                <a:lnTo>
+                  <a:pt x="3387405" y="1828800"/>
+                </a:lnTo>
+                <a:lnTo>
+                  <a:pt x="3396342" y="1828800"/>
+                </a:lnTo>
+                <a:lnTo>
+                  <a:pt x="3405280" y="1828800"/>
+                </a:lnTo>
+                <a:lnTo>
+                  <a:pt x="3414218" y="1828800"/>
+                </a:lnTo>
+                <a:lnTo>
+                  <a:pt x="3423156" y="1828800"/>
+                </a:lnTo>
+                <a:lnTo>
+                  <a:pt x="3432093" y="1828800"/>
+                </a:lnTo>
+                <a:lnTo>
+                  <a:pt x="3441031" y="1828800"/>
+                </a:lnTo>
+                <a:lnTo>
+                  <a:pt x="3449969" y="1828800"/>
+                </a:lnTo>
+                <a:lnTo>
+                  <a:pt x="3458907" y="1828800"/>
+                </a:lnTo>
+                <a:lnTo>
+                  <a:pt x="3467844" y="1828800"/>
+                </a:lnTo>
+                <a:lnTo>
+                  <a:pt x="3476782" y="1828800"/>
+                </a:lnTo>
+                <a:lnTo>
+                  <a:pt x="3485720" y="1828800"/>
+                </a:lnTo>
+                <a:lnTo>
+                  <a:pt x="3494658" y="1828800"/>
+                </a:lnTo>
+                <a:lnTo>
+                  <a:pt x="3503595" y="1828800"/>
+                </a:lnTo>
+                <a:lnTo>
+                  <a:pt x="3512533" y="1828800"/>
+                </a:lnTo>
+                <a:lnTo>
+                  <a:pt x="3521471" y="1828800"/>
+                </a:lnTo>
+                <a:lnTo>
+                  <a:pt x="3530409" y="1828800"/>
+                </a:lnTo>
+                <a:lnTo>
+                  <a:pt x="3539346" y="1828800"/>
+                </a:lnTo>
+                <a:lnTo>
+                  <a:pt x="3548284" y="1828800"/>
+                </a:lnTo>
+                <a:lnTo>
+                  <a:pt x="3557222" y="1828800"/>
+                </a:lnTo>
+                <a:lnTo>
+                  <a:pt x="3566160" y="1828800"/>
+                </a:lnTo>
+                <a:lnTo>
+                  <a:pt x="3566160" y="1828800"/>
+                </a:lnTo>
+                <a:lnTo>
+                  <a:pt x="3557222" y="1828800"/>
+                </a:lnTo>
+                <a:lnTo>
+                  <a:pt x="3548284" y="1828800"/>
+                </a:lnTo>
+                <a:lnTo>
+                  <a:pt x="3539346" y="1828800"/>
+                </a:lnTo>
+                <a:lnTo>
+                  <a:pt x="3530409" y="1828800"/>
+                </a:lnTo>
+                <a:lnTo>
+                  <a:pt x="3521471" y="1828800"/>
+                </a:lnTo>
+                <a:lnTo>
+                  <a:pt x="3512533" y="1828800"/>
+                </a:lnTo>
+                <a:lnTo>
+                  <a:pt x="3503595" y="1828800"/>
+                </a:lnTo>
+                <a:lnTo>
+                  <a:pt x="3494658" y="1828800"/>
+                </a:lnTo>
+                <a:lnTo>
+                  <a:pt x="3485720" y="1828800"/>
+                </a:lnTo>
+                <a:lnTo>
+                  <a:pt x="3476782" y="1828800"/>
+                </a:lnTo>
+                <a:lnTo>
+                  <a:pt x="3467844" y="1828800"/>
+                </a:lnTo>
+                <a:lnTo>
+                  <a:pt x="3458907" y="1828800"/>
+                </a:lnTo>
+                <a:lnTo>
+                  <a:pt x="3449969" y="1828800"/>
+                </a:lnTo>
+                <a:lnTo>
+                  <a:pt x="3441031" y="1828800"/>
+                </a:lnTo>
+                <a:lnTo>
+                  <a:pt x="3432093" y="1828800"/>
+                </a:lnTo>
+                <a:lnTo>
+                  <a:pt x="3423156" y="1828800"/>
+                </a:lnTo>
+                <a:lnTo>
+                  <a:pt x="3414218" y="1828800"/>
+                </a:lnTo>
+                <a:lnTo>
+                  <a:pt x="3405280" y="1828800"/>
+                </a:lnTo>
+                <a:lnTo>
+                  <a:pt x="3396342" y="1828800"/>
+                </a:lnTo>
+                <a:lnTo>
+                  <a:pt x="3387405" y="1828800"/>
+                </a:lnTo>
+                <a:lnTo>
+                  <a:pt x="3378467" y="1828800"/>
+                </a:lnTo>
+                <a:lnTo>
+                  <a:pt x="3369529" y="1828800"/>
+                </a:lnTo>
+                <a:lnTo>
+                  <a:pt x="3360591" y="1828800"/>
+                </a:lnTo>
+                <a:lnTo>
+                  <a:pt x="3351654" y="1828800"/>
+                </a:lnTo>
+                <a:lnTo>
+                  <a:pt x="3342716" y="1828800"/>
+                </a:lnTo>
+                <a:lnTo>
+                  <a:pt x="3333778" y="1828800"/>
+                </a:lnTo>
+                <a:lnTo>
+                  <a:pt x="3324840" y="1828800"/>
+                </a:lnTo>
+                <a:lnTo>
+                  <a:pt x="3315903" y="1828800"/>
+                </a:lnTo>
+                <a:lnTo>
+                  <a:pt x="3306965" y="1828800"/>
+                </a:lnTo>
+                <a:lnTo>
+                  <a:pt x="3298027" y="1828800"/>
+                </a:lnTo>
+                <a:lnTo>
+                  <a:pt x="3289089" y="1828800"/>
+                </a:lnTo>
+                <a:lnTo>
+                  <a:pt x="3280152" y="1828800"/>
+                </a:lnTo>
+                <a:lnTo>
+                  <a:pt x="3271214" y="1828800"/>
+                </a:lnTo>
+                <a:lnTo>
+                  <a:pt x="3262276" y="1828800"/>
+                </a:lnTo>
+                <a:lnTo>
+                  <a:pt x="3253338" y="1828800"/>
+                </a:lnTo>
+                <a:lnTo>
+                  <a:pt x="3244401" y="1828800"/>
+                </a:lnTo>
+                <a:lnTo>
+                  <a:pt x="3235463" y="1828800"/>
+                </a:lnTo>
+                <a:lnTo>
+                  <a:pt x="3226525" y="1828800"/>
+                </a:lnTo>
+                <a:lnTo>
+                  <a:pt x="3217587" y="1828800"/>
+                </a:lnTo>
+                <a:lnTo>
+                  <a:pt x="3208650" y="1828800"/>
+                </a:lnTo>
+                <a:lnTo>
+                  <a:pt x="3199712" y="1828800"/>
+                </a:lnTo>
+                <a:lnTo>
+                  <a:pt x="3190774" y="1828800"/>
+                </a:lnTo>
+                <a:lnTo>
+                  <a:pt x="3181836" y="1828800"/>
+                </a:lnTo>
+                <a:lnTo>
+                  <a:pt x="3172899" y="1828800"/>
+                </a:lnTo>
+                <a:lnTo>
+                  <a:pt x="3163961" y="1828800"/>
+                </a:lnTo>
+                <a:lnTo>
+                  <a:pt x="3155023" y="1828800"/>
+                </a:lnTo>
+                <a:lnTo>
+                  <a:pt x="3146086" y="1828800"/>
+                </a:lnTo>
+                <a:lnTo>
+                  <a:pt x="3137148" y="1828800"/>
+                </a:lnTo>
+                <a:lnTo>
+                  <a:pt x="3128210" y="1828800"/>
+                </a:lnTo>
+                <a:lnTo>
+                  <a:pt x="3119272" y="1828800"/>
+                </a:lnTo>
+                <a:lnTo>
+                  <a:pt x="3110335" y="1828800"/>
+                </a:lnTo>
+                <a:lnTo>
+                  <a:pt x="3101397" y="1828800"/>
+                </a:lnTo>
+                <a:lnTo>
+                  <a:pt x="3092459" y="1828800"/>
+                </a:lnTo>
+                <a:lnTo>
+                  <a:pt x="3083521" y="1828800"/>
+                </a:lnTo>
+                <a:lnTo>
+                  <a:pt x="3074584" y="1828800"/>
+                </a:lnTo>
+                <a:lnTo>
+                  <a:pt x="3065646" y="1828800"/>
+                </a:lnTo>
+                <a:lnTo>
+                  <a:pt x="3056708" y="1828800"/>
+                </a:lnTo>
+                <a:lnTo>
+                  <a:pt x="3047770" y="1828800"/>
+                </a:lnTo>
+                <a:lnTo>
+                  <a:pt x="3038833" y="1828800"/>
+                </a:lnTo>
+                <a:lnTo>
+                  <a:pt x="3029895" y="1828800"/>
+                </a:lnTo>
+                <a:lnTo>
+                  <a:pt x="3020957" y="1828800"/>
+                </a:lnTo>
+                <a:lnTo>
+                  <a:pt x="3012019" y="1828800"/>
+                </a:lnTo>
+                <a:lnTo>
+                  <a:pt x="3003082" y="1828800"/>
+                </a:lnTo>
+                <a:lnTo>
+                  <a:pt x="2994144" y="1828800"/>
+                </a:lnTo>
+                <a:lnTo>
+                  <a:pt x="2985206" y="1828800"/>
+                </a:lnTo>
+                <a:lnTo>
+                  <a:pt x="2976268" y="1828800"/>
+                </a:lnTo>
+                <a:lnTo>
+                  <a:pt x="2967331" y="1828800"/>
+                </a:lnTo>
+                <a:lnTo>
+                  <a:pt x="2958393" y="1828800"/>
+                </a:lnTo>
+                <a:lnTo>
+                  <a:pt x="2949455" y="1828800"/>
+                </a:lnTo>
+                <a:lnTo>
+                  <a:pt x="2940517" y="1828800"/>
+                </a:lnTo>
+                <a:lnTo>
+                  <a:pt x="2931580" y="1828800"/>
+                </a:lnTo>
+                <a:lnTo>
+                  <a:pt x="2922642" y="1828800"/>
+                </a:lnTo>
+                <a:lnTo>
+                  <a:pt x="2913704" y="1828800"/>
+                </a:lnTo>
+                <a:lnTo>
+                  <a:pt x="2904766" y="1828800"/>
+                </a:lnTo>
+                <a:lnTo>
+                  <a:pt x="2895829" y="1828800"/>
+                </a:lnTo>
+                <a:lnTo>
+                  <a:pt x="2886891" y="1828800"/>
+                </a:lnTo>
+                <a:lnTo>
+                  <a:pt x="2877953" y="1828800"/>
+                </a:lnTo>
+                <a:lnTo>
+                  <a:pt x="2869015" y="1828800"/>
+                </a:lnTo>
+                <a:lnTo>
+                  <a:pt x="2860078" y="1828800"/>
+                </a:lnTo>
+                <a:lnTo>
+                  <a:pt x="2851140" y="1828800"/>
+                </a:lnTo>
+                <a:lnTo>
+                  <a:pt x="2842202" y="1828800"/>
+                </a:lnTo>
+                <a:lnTo>
+                  <a:pt x="2833264" y="1828800"/>
+                </a:lnTo>
+                <a:lnTo>
+                  <a:pt x="2824327" y="1828800"/>
+                </a:lnTo>
+                <a:lnTo>
+                  <a:pt x="2815389" y="1828800"/>
+                </a:lnTo>
+                <a:lnTo>
+                  <a:pt x="2806451" y="1828800"/>
+                </a:lnTo>
+                <a:lnTo>
+                  <a:pt x="2797513" y="1828800"/>
+                </a:lnTo>
+                <a:lnTo>
+                  <a:pt x="2788576" y="1828800"/>
+                </a:lnTo>
+                <a:lnTo>
+                  <a:pt x="2779638" y="1828800"/>
+                </a:lnTo>
+                <a:lnTo>
+                  <a:pt x="2770700" y="1828800"/>
+                </a:lnTo>
+                <a:lnTo>
+                  <a:pt x="2761763" y="1828800"/>
+                </a:lnTo>
+                <a:lnTo>
+                  <a:pt x="2752825" y="1828800"/>
+                </a:lnTo>
+                <a:lnTo>
+                  <a:pt x="2743887" y="1828800"/>
+                </a:lnTo>
+                <a:lnTo>
+                  <a:pt x="2734949" y="1828800"/>
+                </a:lnTo>
+                <a:lnTo>
+                  <a:pt x="2726012" y="1828800"/>
+                </a:lnTo>
+                <a:lnTo>
+                  <a:pt x="2717074" y="1828800"/>
+                </a:lnTo>
+                <a:lnTo>
+                  <a:pt x="2708136" y="1828800"/>
+                </a:lnTo>
+                <a:lnTo>
+                  <a:pt x="2699198" y="1828800"/>
+                </a:lnTo>
+                <a:lnTo>
+                  <a:pt x="2690261" y="1828800"/>
+                </a:lnTo>
+                <a:lnTo>
+                  <a:pt x="2681323" y="1828800"/>
+                </a:lnTo>
+                <a:lnTo>
+                  <a:pt x="2672385" y="1828800"/>
+                </a:lnTo>
+                <a:lnTo>
+                  <a:pt x="2663447" y="1828800"/>
+                </a:lnTo>
+                <a:lnTo>
+                  <a:pt x="2654510" y="1828800"/>
+                </a:lnTo>
+                <a:lnTo>
+                  <a:pt x="2645572" y="1828800"/>
+                </a:lnTo>
+                <a:lnTo>
+                  <a:pt x="2636634" y="1828800"/>
+                </a:lnTo>
+                <a:lnTo>
+                  <a:pt x="2627696" y="1828800"/>
+                </a:lnTo>
+                <a:lnTo>
+                  <a:pt x="2618759" y="1828800"/>
+                </a:lnTo>
+                <a:lnTo>
+                  <a:pt x="2609821" y="1828800"/>
+                </a:lnTo>
+                <a:lnTo>
+                  <a:pt x="2600883" y="1828800"/>
+                </a:lnTo>
+                <a:lnTo>
+                  <a:pt x="2591945" y="1828800"/>
+                </a:lnTo>
+                <a:lnTo>
+                  <a:pt x="2583008" y="1828800"/>
+                </a:lnTo>
+                <a:lnTo>
+                  <a:pt x="2574070" y="1828800"/>
+                </a:lnTo>
+                <a:lnTo>
+                  <a:pt x="2565132" y="1828800"/>
+                </a:lnTo>
+                <a:lnTo>
+                  <a:pt x="2556194" y="1828800"/>
+                </a:lnTo>
+                <a:lnTo>
+                  <a:pt x="2547257" y="1828800"/>
+                </a:lnTo>
+                <a:lnTo>
+                  <a:pt x="2538319" y="1828800"/>
+                </a:lnTo>
+                <a:lnTo>
+                  <a:pt x="2529381" y="1828800"/>
+                </a:lnTo>
+                <a:lnTo>
+                  <a:pt x="2520443" y="1828800"/>
+                </a:lnTo>
+                <a:lnTo>
+                  <a:pt x="2511506" y="1828800"/>
+                </a:lnTo>
+                <a:lnTo>
+                  <a:pt x="2502568" y="1828800"/>
+                </a:lnTo>
+                <a:lnTo>
+                  <a:pt x="2493630" y="1828800"/>
+                </a:lnTo>
+                <a:lnTo>
+                  <a:pt x="2484692" y="1828800"/>
+                </a:lnTo>
+                <a:lnTo>
+                  <a:pt x="2475755" y="1828800"/>
+                </a:lnTo>
+                <a:lnTo>
+                  <a:pt x="2466817" y="1828800"/>
+                </a:lnTo>
+                <a:lnTo>
+                  <a:pt x="2457879" y="1828800"/>
+                </a:lnTo>
+                <a:lnTo>
+                  <a:pt x="2448941" y="1828800"/>
+                </a:lnTo>
+                <a:lnTo>
+                  <a:pt x="2440004" y="1828800"/>
+                </a:lnTo>
+                <a:lnTo>
+                  <a:pt x="2431066" y="1828800"/>
+                </a:lnTo>
+                <a:lnTo>
+                  <a:pt x="2422128" y="1828800"/>
+                </a:lnTo>
+                <a:lnTo>
+                  <a:pt x="2413190" y="1828800"/>
+                </a:lnTo>
+                <a:lnTo>
+                  <a:pt x="2404253" y="1828800"/>
+                </a:lnTo>
+                <a:lnTo>
+                  <a:pt x="2395315" y="1828800"/>
+                </a:lnTo>
+                <a:lnTo>
+                  <a:pt x="2386377" y="1828800"/>
+                </a:lnTo>
+                <a:lnTo>
+                  <a:pt x="2377439" y="1828800"/>
+                </a:lnTo>
+                <a:lnTo>
+                  <a:pt x="2368502" y="1828800"/>
+                </a:lnTo>
+                <a:lnTo>
+                  <a:pt x="2359564" y="1828800"/>
+                </a:lnTo>
+                <a:lnTo>
+                  <a:pt x="2350626" y="1828800"/>
+                </a:lnTo>
+                <a:lnTo>
+                  <a:pt x="2341689" y="1828800"/>
+                </a:lnTo>
+                <a:lnTo>
+                  <a:pt x="2332751" y="1828800"/>
+                </a:lnTo>
+                <a:lnTo>
+                  <a:pt x="2323813" y="1828800"/>
+                </a:lnTo>
+                <a:lnTo>
+                  <a:pt x="2314875" y="1828800"/>
+                </a:lnTo>
+                <a:lnTo>
+                  <a:pt x="2305938" y="1828800"/>
+                </a:lnTo>
+                <a:lnTo>
+                  <a:pt x="2297000" y="1828800"/>
+                </a:lnTo>
+                <a:lnTo>
+                  <a:pt x="2288062" y="1828800"/>
+                </a:lnTo>
+                <a:lnTo>
+                  <a:pt x="2279124" y="1828800"/>
+                </a:lnTo>
+                <a:lnTo>
+                  <a:pt x="2270187" y="1828800"/>
+                </a:lnTo>
+                <a:lnTo>
+                  <a:pt x="2261249" y="1828800"/>
+                </a:lnTo>
+                <a:lnTo>
+                  <a:pt x="2252311" y="1828800"/>
+                </a:lnTo>
+                <a:lnTo>
+                  <a:pt x="2243373" y="1828800"/>
+                </a:lnTo>
+                <a:lnTo>
+                  <a:pt x="2234436" y="1828800"/>
+                </a:lnTo>
+                <a:lnTo>
+                  <a:pt x="2225498" y="1828800"/>
+                </a:lnTo>
+                <a:lnTo>
+                  <a:pt x="2216560" y="1828800"/>
+                </a:lnTo>
+                <a:lnTo>
+                  <a:pt x="2207622" y="1828800"/>
+                </a:lnTo>
+                <a:lnTo>
+                  <a:pt x="2198685" y="1828800"/>
+                </a:lnTo>
+                <a:lnTo>
+                  <a:pt x="2189747" y="1828800"/>
+                </a:lnTo>
+                <a:lnTo>
+                  <a:pt x="2180809" y="1828800"/>
+                </a:lnTo>
+                <a:lnTo>
+                  <a:pt x="2171871" y="1828800"/>
+                </a:lnTo>
+                <a:lnTo>
+                  <a:pt x="2162934" y="1828800"/>
+                </a:lnTo>
+                <a:lnTo>
+                  <a:pt x="2153996" y="1828800"/>
+                </a:lnTo>
+                <a:lnTo>
+                  <a:pt x="2145058" y="1828800"/>
+                </a:lnTo>
+                <a:lnTo>
+                  <a:pt x="2136120" y="1828800"/>
+                </a:lnTo>
+                <a:lnTo>
+                  <a:pt x="2127183" y="1828800"/>
+                </a:lnTo>
+                <a:lnTo>
+                  <a:pt x="2118245" y="1828800"/>
+                </a:lnTo>
+                <a:lnTo>
+                  <a:pt x="2109307" y="1828800"/>
+                </a:lnTo>
+                <a:lnTo>
+                  <a:pt x="2100369" y="1828800"/>
+                </a:lnTo>
+                <a:lnTo>
+                  <a:pt x="2091432" y="1828800"/>
+                </a:lnTo>
+                <a:lnTo>
+                  <a:pt x="2082494" y="1828800"/>
+                </a:lnTo>
+                <a:lnTo>
+                  <a:pt x="2073556" y="1828800"/>
+                </a:lnTo>
+                <a:lnTo>
+                  <a:pt x="2064618" y="1828800"/>
+                </a:lnTo>
+                <a:lnTo>
+                  <a:pt x="2055681" y="1828800"/>
+                </a:lnTo>
+                <a:lnTo>
+                  <a:pt x="2046743" y="1828800"/>
+                </a:lnTo>
+                <a:lnTo>
+                  <a:pt x="2037805" y="1828800"/>
+                </a:lnTo>
+                <a:lnTo>
+                  <a:pt x="2028867" y="1828800"/>
+                </a:lnTo>
+                <a:lnTo>
+                  <a:pt x="2019930" y="1828800"/>
+                </a:lnTo>
+                <a:lnTo>
+                  <a:pt x="2010992" y="1828800"/>
+                </a:lnTo>
+                <a:lnTo>
+                  <a:pt x="2002054" y="1828800"/>
+                </a:lnTo>
+                <a:lnTo>
+                  <a:pt x="1993116" y="1828800"/>
+                </a:lnTo>
+                <a:lnTo>
+                  <a:pt x="1984179" y="1828800"/>
+                </a:lnTo>
+                <a:lnTo>
+                  <a:pt x="1975241" y="1828800"/>
+                </a:lnTo>
+                <a:lnTo>
+                  <a:pt x="1966303" y="1828800"/>
+                </a:lnTo>
+                <a:lnTo>
+                  <a:pt x="1957366" y="1828800"/>
+                </a:lnTo>
+                <a:lnTo>
+                  <a:pt x="1948428" y="1828800"/>
+                </a:lnTo>
+                <a:lnTo>
+                  <a:pt x="1939490" y="1828800"/>
+                </a:lnTo>
+                <a:lnTo>
+                  <a:pt x="1930552" y="1828800"/>
+                </a:lnTo>
+                <a:lnTo>
+                  <a:pt x="1921615" y="1828800"/>
+                </a:lnTo>
+                <a:lnTo>
+                  <a:pt x="1912677" y="1828800"/>
+                </a:lnTo>
+                <a:lnTo>
+                  <a:pt x="1903739" y="1828800"/>
+                </a:lnTo>
+                <a:lnTo>
+                  <a:pt x="1894801" y="1828800"/>
+                </a:lnTo>
+                <a:lnTo>
+                  <a:pt x="1885864" y="1828800"/>
+                </a:lnTo>
+                <a:lnTo>
+                  <a:pt x="1876926" y="1828800"/>
+                </a:lnTo>
+                <a:lnTo>
+                  <a:pt x="1867988" y="1828800"/>
+                </a:lnTo>
+                <a:lnTo>
+                  <a:pt x="1859050" y="1828800"/>
+                </a:lnTo>
+                <a:lnTo>
+                  <a:pt x="1850113" y="1828800"/>
+                </a:lnTo>
+                <a:lnTo>
+                  <a:pt x="1841175" y="1828800"/>
+                </a:lnTo>
+                <a:lnTo>
+                  <a:pt x="1832237" y="1828800"/>
+                </a:lnTo>
+                <a:lnTo>
+                  <a:pt x="1823299" y="1828800"/>
+                </a:lnTo>
+                <a:lnTo>
+                  <a:pt x="1814362" y="1828800"/>
+                </a:lnTo>
+                <a:lnTo>
+                  <a:pt x="1805424" y="1828800"/>
+                </a:lnTo>
+                <a:lnTo>
+                  <a:pt x="1796486" y="1828800"/>
+                </a:lnTo>
+                <a:lnTo>
+                  <a:pt x="1787548" y="1828800"/>
+                </a:lnTo>
+                <a:lnTo>
+                  <a:pt x="1778611" y="1828800"/>
+                </a:lnTo>
+                <a:lnTo>
+                  <a:pt x="1769673" y="1828800"/>
+                </a:lnTo>
+                <a:lnTo>
+                  <a:pt x="1760735" y="1828800"/>
+                </a:lnTo>
+                <a:lnTo>
+                  <a:pt x="1751797" y="1828800"/>
+                </a:lnTo>
+                <a:lnTo>
+                  <a:pt x="1742860" y="1828800"/>
+                </a:lnTo>
+                <a:lnTo>
+                  <a:pt x="1733922" y="1828800"/>
+                </a:lnTo>
+                <a:lnTo>
+                  <a:pt x="1724984" y="1828800"/>
+                </a:lnTo>
+                <a:lnTo>
+                  <a:pt x="1716046" y="1828800"/>
+                </a:lnTo>
+                <a:lnTo>
+                  <a:pt x="1707109" y="1828800"/>
+                </a:lnTo>
+                <a:lnTo>
+                  <a:pt x="1698171" y="1828800"/>
+                </a:lnTo>
+                <a:lnTo>
+                  <a:pt x="1689233" y="1828800"/>
+                </a:lnTo>
+                <a:lnTo>
+                  <a:pt x="1680295" y="1828800"/>
+                </a:lnTo>
+                <a:lnTo>
+                  <a:pt x="1671358" y="1828800"/>
+                </a:lnTo>
+                <a:lnTo>
+                  <a:pt x="1662420" y="1828800"/>
+                </a:lnTo>
+                <a:lnTo>
+                  <a:pt x="1653482" y="1828800"/>
+                </a:lnTo>
+                <a:lnTo>
+                  <a:pt x="1644544" y="1828800"/>
+                </a:lnTo>
+                <a:lnTo>
+                  <a:pt x="1635607" y="1828800"/>
+                </a:lnTo>
+                <a:lnTo>
+                  <a:pt x="1626669" y="1828800"/>
+                </a:lnTo>
+                <a:lnTo>
+                  <a:pt x="1617731" y="1828800"/>
+                </a:lnTo>
+                <a:lnTo>
+                  <a:pt x="1608793" y="1828800"/>
+                </a:lnTo>
+                <a:lnTo>
+                  <a:pt x="1599856" y="1828800"/>
+                </a:lnTo>
+                <a:lnTo>
+                  <a:pt x="1590918" y="1828800"/>
+                </a:lnTo>
+                <a:lnTo>
+                  <a:pt x="1581980" y="1828800"/>
+                </a:lnTo>
+                <a:lnTo>
+                  <a:pt x="1573043" y="1828800"/>
+                </a:lnTo>
+                <a:lnTo>
+                  <a:pt x="1564105" y="1828800"/>
+                </a:lnTo>
+                <a:lnTo>
+                  <a:pt x="1555167" y="1828800"/>
+                </a:lnTo>
+                <a:lnTo>
+                  <a:pt x="1546229" y="1828800"/>
+                </a:lnTo>
+                <a:lnTo>
+                  <a:pt x="1537292" y="1828800"/>
+                </a:lnTo>
+                <a:lnTo>
+                  <a:pt x="1528354" y="1828800"/>
+                </a:lnTo>
+                <a:lnTo>
+                  <a:pt x="1519416" y="1828800"/>
+                </a:lnTo>
+                <a:lnTo>
+                  <a:pt x="1510478" y="1828800"/>
+                </a:lnTo>
+                <a:lnTo>
+                  <a:pt x="1501541" y="1828800"/>
+                </a:lnTo>
+                <a:lnTo>
+                  <a:pt x="1492603" y="1828800"/>
+                </a:lnTo>
+                <a:lnTo>
+                  <a:pt x="1483665" y="1828800"/>
+                </a:lnTo>
+                <a:lnTo>
+                  <a:pt x="1474727" y="1828800"/>
+                </a:lnTo>
+                <a:lnTo>
+                  <a:pt x="1465790" y="1828800"/>
+                </a:lnTo>
+                <a:lnTo>
+                  <a:pt x="1456852" y="1828800"/>
+                </a:lnTo>
+                <a:lnTo>
+                  <a:pt x="1447914" y="1828800"/>
+                </a:lnTo>
+                <a:lnTo>
+                  <a:pt x="1438976" y="1828800"/>
+                </a:lnTo>
+                <a:lnTo>
+                  <a:pt x="1430039" y="1828800"/>
+                </a:lnTo>
+                <a:lnTo>
+                  <a:pt x="1421101" y="1828800"/>
+                </a:lnTo>
+                <a:lnTo>
+                  <a:pt x="1412163" y="1828800"/>
+                </a:lnTo>
+                <a:lnTo>
+                  <a:pt x="1403225" y="1828800"/>
+                </a:lnTo>
+                <a:lnTo>
+                  <a:pt x="1394288" y="1828800"/>
+                </a:lnTo>
+                <a:lnTo>
+                  <a:pt x="1385350" y="1828800"/>
+                </a:lnTo>
+                <a:lnTo>
+                  <a:pt x="1376412" y="1828800"/>
+                </a:lnTo>
+                <a:lnTo>
+                  <a:pt x="1367474" y="1828800"/>
+                </a:lnTo>
+                <a:lnTo>
+                  <a:pt x="1358537" y="1828800"/>
+                </a:lnTo>
+                <a:lnTo>
+                  <a:pt x="1349599" y="1828800"/>
+                </a:lnTo>
+                <a:lnTo>
+                  <a:pt x="1340661" y="1828800"/>
+                </a:lnTo>
+                <a:lnTo>
+                  <a:pt x="1331723" y="1828800"/>
+                </a:lnTo>
+                <a:lnTo>
+                  <a:pt x="1322786" y="1828800"/>
+                </a:lnTo>
+                <a:lnTo>
+                  <a:pt x="1313848" y="1828800"/>
+                </a:lnTo>
+                <a:lnTo>
+                  <a:pt x="1304910" y="1828800"/>
+                </a:lnTo>
+                <a:lnTo>
+                  <a:pt x="1295972" y="1828800"/>
+                </a:lnTo>
+                <a:lnTo>
+                  <a:pt x="1287035" y="1828800"/>
+                </a:lnTo>
+                <a:lnTo>
+                  <a:pt x="1278097" y="1828800"/>
+                </a:lnTo>
+                <a:lnTo>
+                  <a:pt x="1269159" y="1828800"/>
+                </a:lnTo>
+                <a:lnTo>
+                  <a:pt x="1260221" y="1828800"/>
+                </a:lnTo>
+                <a:lnTo>
+                  <a:pt x="1251284" y="1828800"/>
+                </a:lnTo>
+                <a:lnTo>
+                  <a:pt x="1242346" y="1828800"/>
+                </a:lnTo>
+                <a:lnTo>
+                  <a:pt x="1233408" y="1828800"/>
+                </a:lnTo>
+                <a:lnTo>
+                  <a:pt x="1224470" y="1828800"/>
+                </a:lnTo>
+                <a:lnTo>
+                  <a:pt x="1215533" y="1828800"/>
+                </a:lnTo>
+                <a:lnTo>
+                  <a:pt x="1206595" y="1828800"/>
+                </a:lnTo>
+                <a:lnTo>
+                  <a:pt x="1197657" y="1828800"/>
+                </a:lnTo>
+                <a:lnTo>
+                  <a:pt x="1188720" y="1828800"/>
+                </a:lnTo>
+                <a:lnTo>
+                  <a:pt x="1179782" y="1828800"/>
+                </a:lnTo>
+                <a:lnTo>
+                  <a:pt x="1170844" y="1828800"/>
+                </a:lnTo>
+                <a:lnTo>
+                  <a:pt x="1161906" y="1828800"/>
+                </a:lnTo>
+                <a:lnTo>
+                  <a:pt x="1152969" y="1828800"/>
+                </a:lnTo>
+                <a:lnTo>
+                  <a:pt x="1144031" y="1828800"/>
+                </a:lnTo>
+                <a:lnTo>
+                  <a:pt x="1135093" y="1828800"/>
+                </a:lnTo>
+                <a:lnTo>
+                  <a:pt x="1126155" y="1828800"/>
+                </a:lnTo>
+                <a:lnTo>
+                  <a:pt x="1117218" y="1828800"/>
+                </a:lnTo>
+                <a:lnTo>
+                  <a:pt x="1108280" y="1828800"/>
+                </a:lnTo>
+                <a:lnTo>
+                  <a:pt x="1099342" y="1828800"/>
+                </a:lnTo>
+                <a:lnTo>
+                  <a:pt x="1090404" y="1828800"/>
+                </a:lnTo>
+                <a:lnTo>
+                  <a:pt x="1081467" y="1828800"/>
+                </a:lnTo>
+                <a:lnTo>
+                  <a:pt x="1072529" y="1828800"/>
+                </a:lnTo>
+                <a:lnTo>
+                  <a:pt x="1063591" y="1828800"/>
+                </a:lnTo>
+                <a:lnTo>
+                  <a:pt x="1054653" y="1828800"/>
+                </a:lnTo>
+                <a:lnTo>
+                  <a:pt x="1045716" y="1828800"/>
+                </a:lnTo>
+                <a:lnTo>
+                  <a:pt x="1036778" y="1828800"/>
+                </a:lnTo>
+                <a:lnTo>
+                  <a:pt x="1027840" y="1828800"/>
+                </a:lnTo>
+                <a:lnTo>
+                  <a:pt x="1018902" y="1828800"/>
+                </a:lnTo>
+                <a:lnTo>
+                  <a:pt x="1009965" y="1828800"/>
+                </a:lnTo>
+                <a:lnTo>
+                  <a:pt x="1001027" y="1828800"/>
+                </a:lnTo>
+                <a:lnTo>
+                  <a:pt x="992089" y="1828800"/>
+                </a:lnTo>
+                <a:lnTo>
+                  <a:pt x="983151" y="1828800"/>
+                </a:lnTo>
+                <a:lnTo>
+                  <a:pt x="974214" y="1828800"/>
+                </a:lnTo>
+                <a:lnTo>
+                  <a:pt x="965276" y="1828800"/>
+                </a:lnTo>
+                <a:lnTo>
+                  <a:pt x="956338" y="1828800"/>
+                </a:lnTo>
+                <a:lnTo>
+                  <a:pt x="947400" y="1828800"/>
+                </a:lnTo>
+                <a:lnTo>
+                  <a:pt x="938463" y="1828800"/>
+                </a:lnTo>
+                <a:lnTo>
+                  <a:pt x="929525" y="1828800"/>
+                </a:lnTo>
+                <a:lnTo>
+                  <a:pt x="920587" y="1828800"/>
+                </a:lnTo>
+                <a:lnTo>
+                  <a:pt x="911649" y="1828800"/>
+                </a:lnTo>
+                <a:lnTo>
+                  <a:pt x="902712" y="1828800"/>
+                </a:lnTo>
+                <a:lnTo>
+                  <a:pt x="893774" y="1828800"/>
+                </a:lnTo>
+                <a:lnTo>
+                  <a:pt x="884836" y="1828800"/>
+                </a:lnTo>
+                <a:lnTo>
+                  <a:pt x="875898" y="1828800"/>
+                </a:lnTo>
+                <a:lnTo>
+                  <a:pt x="866961" y="1828800"/>
+                </a:lnTo>
+                <a:lnTo>
+                  <a:pt x="858023" y="1828800"/>
+                </a:lnTo>
+                <a:lnTo>
+                  <a:pt x="849085" y="1828800"/>
+                </a:lnTo>
+                <a:lnTo>
+                  <a:pt x="840147" y="1828800"/>
+                </a:lnTo>
+                <a:lnTo>
+                  <a:pt x="831210" y="1828800"/>
+                </a:lnTo>
+                <a:lnTo>
+                  <a:pt x="822272" y="1828800"/>
+                </a:lnTo>
+                <a:lnTo>
+                  <a:pt x="813334" y="1828800"/>
+                </a:lnTo>
+                <a:lnTo>
+                  <a:pt x="804396" y="1828800"/>
+                </a:lnTo>
+                <a:lnTo>
+                  <a:pt x="795459" y="1828800"/>
+                </a:lnTo>
+                <a:lnTo>
+                  <a:pt x="786521" y="1828800"/>
+                </a:lnTo>
+                <a:lnTo>
+                  <a:pt x="777583" y="1828800"/>
+                </a:lnTo>
+                <a:lnTo>
+                  <a:pt x="768646" y="1828800"/>
+                </a:lnTo>
+                <a:lnTo>
+                  <a:pt x="759708" y="1828800"/>
+                </a:lnTo>
+                <a:lnTo>
+                  <a:pt x="750770" y="1828800"/>
+                </a:lnTo>
+                <a:lnTo>
+                  <a:pt x="741832" y="1828800"/>
+                </a:lnTo>
+                <a:lnTo>
+                  <a:pt x="732895" y="1828800"/>
+                </a:lnTo>
+                <a:lnTo>
+                  <a:pt x="723957" y="1828800"/>
+                </a:lnTo>
+                <a:lnTo>
+                  <a:pt x="715019" y="1828800"/>
+                </a:lnTo>
+                <a:lnTo>
+                  <a:pt x="706081" y="1828800"/>
+                </a:lnTo>
+                <a:lnTo>
+                  <a:pt x="697144" y="1828800"/>
+                </a:lnTo>
+                <a:lnTo>
+                  <a:pt x="688206" y="1828800"/>
+                </a:lnTo>
+                <a:lnTo>
+                  <a:pt x="679268" y="1828800"/>
+                </a:lnTo>
+                <a:lnTo>
+                  <a:pt x="670330" y="1828800"/>
+                </a:lnTo>
+                <a:lnTo>
+                  <a:pt x="661393" y="1828800"/>
+                </a:lnTo>
+                <a:lnTo>
+                  <a:pt x="652455" y="1828800"/>
+                </a:lnTo>
+                <a:lnTo>
+                  <a:pt x="643517" y="1828800"/>
+                </a:lnTo>
+                <a:lnTo>
+                  <a:pt x="634579" y="1828800"/>
+                </a:lnTo>
+                <a:lnTo>
+                  <a:pt x="625642" y="1828800"/>
+                </a:lnTo>
+                <a:lnTo>
+                  <a:pt x="616704" y="1828800"/>
+                </a:lnTo>
+                <a:lnTo>
+                  <a:pt x="607766" y="1828800"/>
+                </a:lnTo>
+                <a:lnTo>
+                  <a:pt x="598828" y="1828800"/>
+                </a:lnTo>
+                <a:lnTo>
+                  <a:pt x="589891" y="1828800"/>
+                </a:lnTo>
+                <a:lnTo>
+                  <a:pt x="580953" y="1828800"/>
+                </a:lnTo>
+                <a:lnTo>
+                  <a:pt x="572015" y="1828800"/>
+                </a:lnTo>
+                <a:lnTo>
+                  <a:pt x="563077" y="1828800"/>
+                </a:lnTo>
+                <a:lnTo>
+                  <a:pt x="554140" y="1828800"/>
+                </a:lnTo>
+                <a:lnTo>
+                  <a:pt x="545202" y="1828800"/>
+                </a:lnTo>
+                <a:lnTo>
+                  <a:pt x="536264" y="1828800"/>
+                </a:lnTo>
+                <a:lnTo>
+                  <a:pt x="527326" y="1828800"/>
+                </a:lnTo>
+                <a:lnTo>
+                  <a:pt x="518389" y="1828800"/>
+                </a:lnTo>
+                <a:lnTo>
+                  <a:pt x="509451" y="1828800"/>
+                </a:lnTo>
+                <a:lnTo>
+                  <a:pt x="500513" y="1828800"/>
+                </a:lnTo>
+                <a:lnTo>
+                  <a:pt x="491575" y="1828800"/>
+                </a:lnTo>
+                <a:lnTo>
+                  <a:pt x="482638" y="1828800"/>
+                </a:lnTo>
+                <a:lnTo>
+                  <a:pt x="473700" y="1828800"/>
+                </a:lnTo>
+                <a:lnTo>
+                  <a:pt x="464762" y="1828800"/>
+                </a:lnTo>
+                <a:lnTo>
+                  <a:pt x="455824" y="1828800"/>
+                </a:lnTo>
+                <a:lnTo>
+                  <a:pt x="446887" y="1828800"/>
+                </a:lnTo>
+                <a:lnTo>
+                  <a:pt x="437949" y="1828800"/>
+                </a:lnTo>
+                <a:lnTo>
+                  <a:pt x="429011" y="1828800"/>
+                </a:lnTo>
+                <a:lnTo>
+                  <a:pt x="420073" y="1828800"/>
+                </a:lnTo>
+                <a:lnTo>
+                  <a:pt x="411136" y="1828800"/>
+                </a:lnTo>
+                <a:lnTo>
+                  <a:pt x="402198" y="1828800"/>
+                </a:lnTo>
+                <a:lnTo>
+                  <a:pt x="393260" y="1828800"/>
+                </a:lnTo>
+                <a:lnTo>
+                  <a:pt x="384323" y="1828800"/>
+                </a:lnTo>
+                <a:lnTo>
+                  <a:pt x="375385" y="1828800"/>
+                </a:lnTo>
+                <a:lnTo>
+                  <a:pt x="366447" y="1828800"/>
+                </a:lnTo>
+                <a:lnTo>
+                  <a:pt x="357509" y="1828800"/>
+                </a:lnTo>
+                <a:lnTo>
+                  <a:pt x="348572" y="1828800"/>
+                </a:lnTo>
+                <a:lnTo>
+                  <a:pt x="339634" y="1828800"/>
+                </a:lnTo>
+                <a:lnTo>
+                  <a:pt x="330696" y="1828800"/>
+                </a:lnTo>
+                <a:lnTo>
+                  <a:pt x="321758" y="1828800"/>
+                </a:lnTo>
+                <a:lnTo>
+                  <a:pt x="312821" y="1828800"/>
+                </a:lnTo>
+                <a:lnTo>
+                  <a:pt x="303883" y="1828800"/>
+                </a:lnTo>
+                <a:lnTo>
+                  <a:pt x="294945" y="1828800"/>
+                </a:lnTo>
+                <a:lnTo>
+                  <a:pt x="286007" y="1828800"/>
+                </a:lnTo>
+                <a:lnTo>
+                  <a:pt x="277070" y="1828800"/>
+                </a:lnTo>
+                <a:lnTo>
+                  <a:pt x="268132" y="1828800"/>
+                </a:lnTo>
+                <a:lnTo>
+                  <a:pt x="259194" y="1828800"/>
+                </a:lnTo>
+                <a:lnTo>
+                  <a:pt x="250256" y="1828800"/>
+                </a:lnTo>
+                <a:lnTo>
+                  <a:pt x="241319" y="1828800"/>
+                </a:lnTo>
+                <a:lnTo>
+                  <a:pt x="232381" y="1828800"/>
+                </a:lnTo>
+                <a:lnTo>
+                  <a:pt x="223443" y="1828800"/>
+                </a:lnTo>
+                <a:lnTo>
+                  <a:pt x="214505" y="1828800"/>
+                </a:lnTo>
+                <a:lnTo>
+                  <a:pt x="205568" y="1828800"/>
+                </a:lnTo>
+                <a:lnTo>
+                  <a:pt x="196630" y="1828800"/>
+                </a:lnTo>
+                <a:lnTo>
+                  <a:pt x="187692" y="1828800"/>
+                </a:lnTo>
+                <a:lnTo>
+                  <a:pt x="178754" y="1828800"/>
+                </a:lnTo>
+                <a:lnTo>
+                  <a:pt x="169817" y="1828800"/>
+                </a:lnTo>
+                <a:lnTo>
+                  <a:pt x="160879" y="1828800"/>
+                </a:lnTo>
+                <a:lnTo>
+                  <a:pt x="151941" y="1828800"/>
+                </a:lnTo>
+                <a:lnTo>
+                  <a:pt x="143003" y="1828800"/>
+                </a:lnTo>
+                <a:lnTo>
+                  <a:pt x="134066" y="1828800"/>
+                </a:lnTo>
+                <a:lnTo>
+                  <a:pt x="125128" y="1828800"/>
+                </a:lnTo>
+                <a:lnTo>
+                  <a:pt x="116190" y="1828800"/>
+                </a:lnTo>
+                <a:lnTo>
+                  <a:pt x="107252" y="1828800"/>
+                </a:lnTo>
+                <a:lnTo>
+                  <a:pt x="98315" y="1828800"/>
+                </a:lnTo>
+                <a:lnTo>
+                  <a:pt x="89377" y="1828800"/>
+                </a:lnTo>
+                <a:lnTo>
+                  <a:pt x="80439" y="1828800"/>
+                </a:lnTo>
+                <a:lnTo>
+                  <a:pt x="71501" y="1828800"/>
+                </a:lnTo>
+                <a:lnTo>
+                  <a:pt x="62564" y="1828800"/>
+                </a:lnTo>
+                <a:lnTo>
+                  <a:pt x="53626" y="1828800"/>
+                </a:lnTo>
+                <a:lnTo>
+                  <a:pt x="44688" y="1828800"/>
+                </a:lnTo>
+                <a:lnTo>
+                  <a:pt x="35750" y="1828800"/>
+                </a:lnTo>
+                <a:lnTo>
+                  <a:pt x="26813" y="1828800"/>
+                </a:lnTo>
+                <a:lnTo>
+                  <a:pt x="17875" y="1828800"/>
+                </a:lnTo>
+                <a:lnTo>
+                  <a:pt x="8937" y="1828800"/>
+                </a:lnTo>
+                <a:lnTo>
+                  <a:pt x="0" y="1828800"/>
+                </a:lnTo>
+                <a:close/>
+              </a:path>
+            </a:pathLst>
+          </a:custGeom>
+          <a:solidFill>
+            <a:srgbClr val="8EDBD4">
+              <a:alpha val="45000"/>
+            </a:srgbClr>
+          </a:solidFill>
+          <a:ln w="10160">
+            <a:solidFill>
+              <a:srgbClr val="8EDBD4">
+                <a:alpha val="45000"/>
+              </a:srgbClr>
+            </a:solidFill>
+          </a:ln>
+          <a:effectLst/>
+        </p:spPr>
+        <p:txBody>
+          <a:bodyPr rtlCol="0" anchor="ctr"/>
+          <a:lstStyle/>
+          <a:p>
+            <a:pPr algn="ctr"/>
+          </a:p>
+        </p:txBody>
+      </p:sp>
+      <p:sp>
+        <p:nvSpPr>
+          <p:cNvPr id="24" name="C1-E34 polygon 22" descr="sci-ppt:o022"/>
+          <p:cNvSpPr/>
+          <p:nvPr/>
+        </p:nvSpPr>
+        <p:spPr>
+          <a:xfrm>
+            <a:off x="914400" y="2011680"/>
+            <a:ext cx="3566160" cy="1828800"/>
+          </a:xfrm>
+          <a:custGeom>
+            <a:avLst/>
+            <a:gdLst/>
+            <a:ahLst/>
+            <a:cxnLst/>
+            <a:rect l="l" t="t" r="r" b="b"/>
+            <a:pathLst>
+              <a:path w="3566160" h="1828800">
+                <a:moveTo>
+                  <a:pt x="0" y="1828800"/>
+                </a:moveTo>
+                <a:lnTo>
+                  <a:pt x="0" y="0"/>
+                </a:lnTo>
+                <a:lnTo>
+                  <a:pt x="891540" y="0"/>
+                </a:lnTo>
+                <a:lnTo>
+                  <a:pt x="891540" y="1828800"/>
+                </a:lnTo>
+                <a:lnTo>
+                  <a:pt x="3566160" y="1828800"/>
+                </a:lnTo>
+              </a:path>
+            </a:pathLst>
+          </a:custGeom>
+          <a:noFill/>
+          <a:ln w="38100">
             <a:solidFill>
               <a:srgbClr val="8EDBD4"/>
+            </a:solidFill>
+          </a:ln>
+          <a:effectLst/>
+        </p:spPr>
+        <p:txBody>
+          <a:bodyPr rtlCol="0" anchor="ctr"/>
+          <a:lstStyle/>
+          <a:p>
+            <a:pPr algn="ctr"/>
+          </a:p>
+        </p:txBody>
+      </p:sp>
+      <p:sp>
+        <p:nvSpPr>
+          <p:cNvPr id="25" name="C1-E34 text 23" descr="sci-ppt:o023"/>
+          <p:cNvSpPr txBox="1"/>
+          <p:nvPr/>
+        </p:nvSpPr>
+        <p:spPr>
+          <a:xfrm>
+            <a:off x="1986534" y="1874520"/>
+            <a:ext cx="2194560" cy="223900"/>
+          </a:xfrm>
+          <a:prstGeom prst="rect">
+            <a:avLst/>
+          </a:prstGeom>
+          <a:noFill/>
+          <a:effectLst/>
+        </p:spPr>
+        <p:txBody>
+          <a:bodyPr wrap="none" lIns="18288" rIns="18288" tIns="18288" bIns="18288" anchor="t">
+            <a:spAutoFit/>
+          </a:bodyPr>
+          <a:lstStyle/>
+          <a:p>
+            <a:pPr algn="l">
+              <a:spcAft>
+                <a:spcPts val="0"/>
+              </a:spcAft>
+            </a:pPr>
+            <a:r>
+              <a:rPr sz="1150" b="0" i="0">
+                <a:solidFill>
+                  <a:srgbClr val="8EDBD4"/>
+                </a:solidFill>
+                <a:latin typeface="Arial"/>
+              </a:rPr>
+              <a:t>Π = ∫(p − p_ref)dt</a:t>
+            </a:r>
+          </a:p>
+        </p:txBody>
+      </p:sp>
+      <p:sp>
+        <p:nvSpPr>
+          <p:cNvPr id="26" name="C1-E34 text 24" descr="sci-ppt:o024"/>
+          <p:cNvSpPr txBox="1"/>
+          <p:nvPr/>
+        </p:nvSpPr>
+        <p:spPr>
+          <a:xfrm>
+            <a:off x="914400" y="960120"/>
+            <a:ext cx="3566160" cy="262636"/>
+          </a:xfrm>
+          <a:prstGeom prst="rect">
+            <a:avLst/>
+          </a:prstGeom>
+          <a:noFill/>
+          <a:effectLst/>
+        </p:spPr>
+        <p:txBody>
+          <a:bodyPr wrap="none" lIns="18288" rIns="18288" tIns="18288" bIns="18288" anchor="t">
+            <a:spAutoFit/>
+          </a:bodyPr>
+          <a:lstStyle/>
+          <a:p>
+            <a:pPr algn="l">
+              <a:spcAft>
+                <a:spcPts val="0"/>
+              </a:spcAft>
+            </a:pPr>
+            <a:r>
+              <a:rPr sz="1400" b="1" i="0">
+                <a:solidFill>
+                  <a:srgbClr val="8EDBD4"/>
+                </a:solidFill>
+                <a:latin typeface="Arial"/>
+              </a:rPr>
+              <a:t>1  Pulse → impulse</a:t>
+            </a:r>
+          </a:p>
+        </p:txBody>
+      </p:sp>
+      <p:sp>
+        <p:nvSpPr>
+          <p:cNvPr id="27" name="C1-E34 text 25" descr="sci-ppt:o025"/>
+          <p:cNvSpPr txBox="1"/>
+          <p:nvPr/>
+        </p:nvSpPr>
+        <p:spPr>
+          <a:xfrm>
+            <a:off x="4937760" y="960120"/>
+            <a:ext cx="3566160" cy="262636"/>
+          </a:xfrm>
+          <a:prstGeom prst="rect">
+            <a:avLst/>
+          </a:prstGeom>
+          <a:noFill/>
+          <a:effectLst/>
+        </p:spPr>
+        <p:txBody>
+          <a:bodyPr wrap="none" lIns="18288" rIns="18288" tIns="18288" bIns="18288" anchor="t">
+            <a:spAutoFit/>
+          </a:bodyPr>
+          <a:lstStyle/>
+          <a:p>
+            <a:pPr algn="l">
+              <a:spcAft>
+                <a:spcPts val="0"/>
+              </a:spcAft>
+            </a:pPr>
+            <a:r>
+              <a:rPr sz="1400" b="1" i="0">
+                <a:solidFill>
+                  <a:srgbClr val="F2B880"/>
+                </a:solidFill>
+                <a:latin typeface="Arial"/>
+              </a:rPr>
+              <a:t>2  Impulse → velocity</a:t>
+            </a:r>
+          </a:p>
+        </p:txBody>
+      </p:sp>
+      <p:sp>
+        <p:nvSpPr>
+          <p:cNvPr id="28" name="C1-E34 rect 26" descr="sci-ppt:o026"/>
+          <p:cNvSpPr/>
+          <p:nvPr/>
+        </p:nvSpPr>
+        <p:spPr>
+          <a:xfrm>
+            <a:off x="5029200" y="2194560"/>
+            <a:ext cx="3017520" cy="731520"/>
+          </a:xfrm>
+          <a:prstGeom prst="rect">
+            <a:avLst/>
+          </a:prstGeom>
+          <a:solidFill>
+            <a:srgbClr val="1E4A5A"/>
+          </a:solidFill>
+          <a:ln w="17780">
+            <a:solidFill>
+              <a:srgbClr val="2B6678"/>
+            </a:solidFill>
+          </a:ln>
+          <a:effectLst/>
+        </p:spPr>
+        <p:txBody>
+          <a:bodyPr rtlCol="0" anchor="ctr"/>
+          <a:lstStyle/>
+          <a:p>
+            <a:pPr algn="ctr"/>
+          </a:p>
+        </p:txBody>
+      </p:sp>
+      <p:sp>
+        <p:nvSpPr>
+          <p:cNvPr id="29" name="C1-E34 rect 27" descr="sci-ppt:o027"/>
+          <p:cNvSpPr/>
+          <p:nvPr/>
+        </p:nvSpPr>
+        <p:spPr>
+          <a:xfrm>
+            <a:off x="4892040" y="2103120"/>
+            <a:ext cx="137160" cy="914400"/>
+          </a:xfrm>
+          <a:prstGeom prst="rect">
+            <a:avLst/>
+          </a:prstGeom>
+          <a:solidFill>
+            <a:srgbClr val="3A5362"/>
+          </a:solidFill>
+          <a:ln w="15240">
+            <a:solidFill>
+              <a:srgbClr val="B4C7D2"/>
+            </a:solidFill>
+          </a:ln>
+          <a:effectLst/>
+        </p:spPr>
+        <p:txBody>
+          <a:bodyPr rtlCol="0" anchor="ctr"/>
+          <a:lstStyle/>
+          <a:p>
+            <a:pPr algn="ctr"/>
+          </a:p>
+        </p:txBody>
+      </p:sp>
+      <p:cxnSp>
+        <p:nvCxnSpPr>
+          <p:cNvPr id="30" name="C1-E34 arrow 28" descr="sci-ppt:o028"/>
+          <p:cNvCxnSpPr/>
+          <p:nvPr/>
+        </p:nvCxnSpPr>
+        <p:spPr>
+          <a:xfrm>
+            <a:off x="5257800" y="2560320"/>
+            <a:ext cx="594360" cy="0"/>
+          </a:xfrm>
+          <a:prstGeom prst="line">
+            <a:avLst/>
+          </a:prstGeom>
+          <a:ln w="38100">
+            <a:solidFill>
+              <a:srgbClr val="F2B880"/>
             </a:solidFill>
             <a:headEnd type="none" w="med" len="med"/>
             <a:tailEnd type="triangle" w="med" len="med"/>
@@ -3236,16 +6408,64 @@
           <a:effectLst/>
         </p:spPr>
       </p:cxnSp>
-      <p:sp>
-        <p:nvSpPr>
-          <p:cNvPr id="7" name="text6" descr="sci-ppt:C1-E34-006"/>
+      <p:cxnSp>
+        <p:nvCxnSpPr>
+          <p:cNvPr id="31" name="C1-E34 arrow 29" descr="sci-ppt:o029"/>
+          <p:cNvCxnSpPr/>
+          <p:nvPr/>
+        </p:nvCxnSpPr>
+        <p:spPr>
+          <a:xfrm>
+            <a:off x="6172200" y="2560320"/>
+            <a:ext cx="594360" cy="0"/>
+          </a:xfrm>
+          <a:prstGeom prst="line">
+            <a:avLst/>
+          </a:prstGeom>
+          <a:ln w="38100">
+            <a:solidFill>
+              <a:srgbClr val="F2B880"/>
+            </a:solidFill>
+            <a:headEnd type="none" w="med" len="med"/>
+            <a:tailEnd type="triangle" w="med" len="med"/>
+          </a:ln>
+          <a:effectLst/>
+        </p:spPr>
+      </p:cxnSp>
+      <p:cxnSp>
+        <p:nvCxnSpPr>
+          <p:cNvPr id="32" name="C1-E34 arrow 30" descr="sci-ppt:o030"/>
+          <p:cNvCxnSpPr/>
+          <p:nvPr/>
+        </p:nvCxnSpPr>
+        <p:spPr>
+          <a:xfrm>
+            <a:off x="7086600" y="2560320"/>
+            <a:ext cx="594360" cy="0"/>
+          </a:xfrm>
+          <a:prstGeom prst="line">
+            <a:avLst/>
+          </a:prstGeom>
+          <a:ln w="38100">
+            <a:solidFill>
+              <a:srgbClr val="F2B880"/>
+            </a:solidFill>
+            <a:headEnd type="none" w="med" len="med"/>
+            <a:tailEnd type="triangle" w="med" len="med"/>
+          </a:ln>
+          <a:effectLst/>
+        </p:spPr>
+      </p:cxnSp>
+      <p:sp>
+        <p:nvSpPr>
+          <p:cNvPr id="33" name="C1-E34 text 31" descr="sci-ppt:o031"/>
           <p:cNvSpPr txBox="1"/>
           <p:nvPr/>
         </p:nvSpPr>
         <p:spPr>
           <a:xfrm>
-            <a:off x="1402080" y="1463040"/>
-            <a:ext cx="3657600" cy="377952"/>
+            <a:off x="5029200" y="3063240"/>
+            <a:ext cx="3017520" cy="239395"/>
           </a:xfrm>
           <a:prstGeom prst="rect">
             <a:avLst/>
@@ -3254,7 +6474,7 @@
           <a:effectLst/>
         </p:spPr>
         <p:txBody>
-          <a:bodyPr wrap="none" lIns="27432" rIns="27432" tIns="18288" bIns="18288" anchor="ctr">
+          <a:bodyPr wrap="none" lIns="18288" rIns="18288" tIns="18288" bIns="18288" anchor="t">
             <a:spAutoFit/>
           </a:bodyPr>
           <a:lstStyle/>
@@ -3265,27 +6485,27 @@
               </a:spcAft>
             </a:pPr>
             <a:r>
-              <a:rPr sz="1920" b="0" i="0">
+              <a:rPr sz="1250" b="1" i="0">
                 <a:solidFill>
                   <a:srgbClr val="E7F0F3"/>
                 </a:solidFill>
                 <a:latin typeface="Arial"/>
               </a:rPr>
-              <a:t>Π0 at z = 0</a:t>
-            </a:r>
-          </a:p>
-        </p:txBody>
-      </p:sp>
-      <p:sp>
-        <p:nvSpPr>
-          <p:cNvPr id="8" name="text7" descr="sci-ppt:C1-E34-007"/>
+              <a:t>Δu ≃ −∇Π/ρ,   ∇²Π = 0</a:t>
+            </a:r>
+          </a:p>
+        </p:txBody>
+      </p:sp>
+      <p:sp>
+        <p:nvSpPr>
+          <p:cNvPr id="34" name="C1-E34 text 32" descr="sci-ppt:o032"/>
           <p:cNvSpPr txBox="1"/>
           <p:nvPr/>
         </p:nvSpPr>
         <p:spPr>
           <a:xfrm>
-            <a:off x="7315200" y="1463040"/>
-            <a:ext cx="4267200" cy="377952"/>
+            <a:off x="5029200" y="3520440"/>
+            <a:ext cx="3017520" cy="239395"/>
           </a:xfrm>
           <a:prstGeom prst="rect">
             <a:avLst/>
@@ -3294,7 +6514,7 @@
           <a:effectLst/>
         </p:spPr>
         <p:txBody>
-          <a:bodyPr wrap="none" lIns="27432" rIns="27432" tIns="18288" bIns="18288" anchor="ctr">
+          <a:bodyPr wrap="none" lIns="18288" rIns="18288" tIns="18288" bIns="18288" anchor="t">
             <a:spAutoFit/>
           </a:bodyPr>
           <a:lstStyle/>
@@ -3305,27 +6525,27 @@
               </a:spcAft>
             </a:pPr>
             <a:r>
-              <a:rPr sz="1920" b="0" i="0">
+              <a:rPr sz="1250" b="1" i="0">
                 <a:solidFill>
-                  <a:srgbClr val="E7F0F3"/>
+                  <a:srgbClr val="F2B880"/>
                 </a:solidFill>
                 <a:latin typeface="Arial"/>
               </a:rPr>
-              <a:t>Π = 0 at z = L</a:t>
-            </a:r>
-          </a:p>
-        </p:txBody>
-      </p:sp>
-      <p:sp>
-        <p:nvSpPr>
-          <p:cNvPr id="9" name="text8" descr="sci-ppt:C1-E34-008"/>
+              <a:t>U_column = Π₀/(ρL) = 3.0 m/s</a:t>
+            </a:r>
+          </a:p>
+        </p:txBody>
+      </p:sp>
+      <p:sp>
+        <p:nvSpPr>
+          <p:cNvPr id="35" name="C1-E34 text 33" descr="sci-ppt:o033"/>
           <p:cNvSpPr txBox="1"/>
           <p:nvPr/>
         </p:nvSpPr>
         <p:spPr>
           <a:xfrm>
-            <a:off x="3108960" y="2987040"/>
-            <a:ext cx="4876800" cy="359054"/>
+            <a:off x="8686800" y="960120"/>
+            <a:ext cx="3108960" cy="262636"/>
           </a:xfrm>
           <a:prstGeom prst="rect">
             <a:avLst/>
@@ -3334,7 +6554,7 @@
           <a:effectLst/>
         </p:spPr>
         <p:txBody>
-          <a:bodyPr wrap="none" lIns="27432" rIns="27432" tIns="18288" bIns="18288" anchor="ctr">
+          <a:bodyPr wrap="none" lIns="18288" rIns="18288" tIns="18288" bIns="18288" anchor="t">
             <a:spAutoFit/>
           </a:bodyPr>
           <a:lstStyle/>
@@ -3345,27 +6565,27 @@
               </a:spcAft>
             </a:pPr>
             <a:r>
-              <a:rPr sz="1823" b="0" i="0">
+              <a:rPr sz="1400" b="1" i="0">
                 <a:solidFill>
-                  <a:srgbClr val="E7F0F3"/>
+                  <a:srgbClr val="F28BA0"/>
                 </a:solidFill>
                 <a:latin typeface="Arial"/>
               </a:rPr>
-              <a:t>Δ u_z toward outlet</a:t>
-            </a:r>
-          </a:p>
-        </p:txBody>
-      </p:sp>
-      <p:sp>
-        <p:nvSpPr>
-          <p:cNvPr id="10" name="text9" descr="sci-ppt:C1-E34-009"/>
+              <a:t>3  Check the limits</a:t>
+            </a:r>
+          </a:p>
+        </p:txBody>
+      </p:sp>
+      <p:sp>
+        <p:nvSpPr>
+          <p:cNvPr id="36" name="C1-E34 text 34" descr="sci-ppt:o034"/>
           <p:cNvSpPr txBox="1"/>
           <p:nvPr/>
         </p:nvSpPr>
         <p:spPr>
           <a:xfrm>
-            <a:off x="2255520" y="4084320"/>
-            <a:ext cx="9022080" cy="359054"/>
+            <a:off x="8887968" y="1463040"/>
+            <a:ext cx="2907791" cy="231648"/>
           </a:xfrm>
           <a:prstGeom prst="rect">
             <a:avLst/>
@@ -3374,7 +6594,7 @@
           <a:effectLst/>
         </p:spPr>
         <p:txBody>
-          <a:bodyPr wrap="none" lIns="27432" rIns="27432" tIns="18288" bIns="18288" anchor="ctr">
+          <a:bodyPr wrap="none" lIns="18288" rIns="18288" tIns="18288" bIns="18288" anchor="t">
             <a:spAutoFit/>
           </a:bodyPr>
           <a:lstStyle/>
@@ -3385,27 +6605,59 @@
               </a:spcAft>
             </a:pPr>
             <a:r>
-              <a:rPr sz="1823" b="0" i="0">
+              <a:rPr sz="1200" b="0" i="0">
                 <a:solidFill>
                   <a:srgbClr val="E7F0F3"/>
                 </a:solidFill>
                 <a:latin typeface="Arial"/>
               </a:rPr>
-              <a:t>Pressure impulse gradient drives early acceleration.</a:t>
-            </a:r>
-          </a:p>
-        </p:txBody>
-      </p:sp>
-      <p:sp>
-        <p:nvSpPr>
-          <p:cNvPr id="11" name="text10" descr="sci-ppt:C1-E34-010"/>
+              <a:t>Uτ/L = 0.015 ≪ 1</a:t>
+            </a:r>
+          </a:p>
+        </p:txBody>
+      </p:sp>
+      <p:sp>
+        <p:nvSpPr>
+          <p:cNvPr id="37" name="C1-E34 ellipse 35" descr="sci-ppt:o035"/>
+          <p:cNvSpPr/>
+          <p:nvPr/>
+        </p:nvSpPr>
+        <p:spPr>
+          <a:xfrm>
+            <a:off x="8718804" y="1516380"/>
+            <a:ext cx="82296" cy="82296"/>
+          </a:xfrm>
+          <a:prstGeom prst="ellipse">
+            <a:avLst/>
+          </a:prstGeom>
+          <a:solidFill>
+            <a:srgbClr val="8EDBD4"/>
+          </a:solidFill>
+          <a:ln w="12700">
+            <a:solidFill>
+              <a:srgbClr val="8EDBD4"/>
+            </a:solidFill>
+          </a:ln>
+          <a:effectLst/>
+        </p:spPr>
+        <p:txBody>
+          <a:bodyPr rtlCol="0" anchor="ctr"/>
+          <a:lstStyle/>
+          <a:p>
+            <a:pPr algn="ctr"/>
+          </a:p>
+        </p:txBody>
+      </p:sp>
+      <p:sp>
+        <p:nvSpPr>
+          <p:cNvPr id="38" name="C1-E34 text 36" descr="sci-ppt:o036"/>
           <p:cNvSpPr txBox="1"/>
           <p:nvPr/>
         </p:nvSpPr>
         <p:spPr>
           <a:xfrm>
-            <a:off x="365760" y="4974336"/>
-            <a:ext cx="5547360" cy="321259"/>
+            <a:off x="8887968" y="1740408"/>
+            <a:ext cx="2907791" cy="231648"/>
           </a:xfrm>
           <a:prstGeom prst="rect">
             <a:avLst/>
@@ -3414,7 +6666,7 @@
           <a:effectLst/>
         </p:spPr>
         <p:txBody>
-          <a:bodyPr wrap="none" lIns="27432" rIns="27432" tIns="18288" bIns="18288" anchor="ctr">
+          <a:bodyPr wrap="none" lIns="18288" rIns="18288" tIns="18288" bIns="18288" anchor="t">
             <a:spAutoFit/>
           </a:bodyPr>
           <a:lstStyle/>
@@ -3425,27 +6677,59 @@
               </a:spcAft>
             </a:pPr>
             <a:r>
-              <a:rPr sz="1632" b="0" i="0">
+              <a:rPr sz="1200" b="0" i="0">
                 <a:solidFill>
                   <a:srgbClr val="E7F0F3"/>
                 </a:solidFill>
                 <a:latin typeface="Arial"/>
               </a:rPr>
-              <a:t>Π(x)</a:t>
-            </a:r>
-          </a:p>
-        </p:txBody>
-      </p:sp>
-      <p:sp>
-        <p:nvSpPr>
-          <p:cNvPr id="12" name="text11" descr="sci-ppt:C1-E34-011"/>
+              <a:t>ντ/L² = 5×10⁻⁵ ≪ 1</a:t>
+            </a:r>
+          </a:p>
+        </p:txBody>
+      </p:sp>
+      <p:sp>
+        <p:nvSpPr>
+          <p:cNvPr id="39" name="C1-E34 ellipse 37" descr="sci-ppt:o037"/>
+          <p:cNvSpPr/>
+          <p:nvPr/>
+        </p:nvSpPr>
+        <p:spPr>
+          <a:xfrm>
+            <a:off x="8718804" y="1793748"/>
+            <a:ext cx="82296" cy="82296"/>
+          </a:xfrm>
+          <a:prstGeom prst="ellipse">
+            <a:avLst/>
+          </a:prstGeom>
+          <a:solidFill>
+            <a:srgbClr val="8EDBD4"/>
+          </a:solidFill>
+          <a:ln w="12700">
+            <a:solidFill>
+              <a:srgbClr val="8EDBD4"/>
+            </a:solidFill>
+          </a:ln>
+          <a:effectLst/>
+        </p:spPr>
+        <p:txBody>
+          <a:bodyPr rtlCol="0" anchor="ctr"/>
+          <a:lstStyle/>
+          <a:p>
+            <a:pPr algn="ctr"/>
+          </a:p>
+        </p:txBody>
+      </p:sp>
+      <p:sp>
+        <p:nvSpPr>
+          <p:cNvPr id="40" name="C1-E34 text 38" descr="sci-ppt:o038"/>
           <p:cNvSpPr txBox="1"/>
           <p:nvPr/>
         </p:nvSpPr>
         <p:spPr>
           <a:xfrm>
-            <a:off x="365760" y="5266944"/>
-            <a:ext cx="5547360" cy="321259"/>
+            <a:off x="8887968" y="2017776"/>
+            <a:ext cx="2907791" cy="417576"/>
           </a:xfrm>
           <a:prstGeom prst="rect">
             <a:avLst/>
@@ -3454,7 +6738,7 @@
           <a:effectLst/>
         </p:spPr>
         <p:txBody>
-          <a:bodyPr wrap="none" lIns="27432" rIns="27432" tIns="18288" bIns="18288" anchor="ctr">
+          <a:bodyPr wrap="none" lIns="18288" rIns="18288" tIns="18288" bIns="18288" anchor="t">
             <a:spAutoFit/>
           </a:bodyPr>
           <a:lstStyle/>
@@ -3465,27 +6749,107 @@
               </a:spcAft>
             </a:pPr>
             <a:r>
-              <a:rPr sz="1632" b="0" i="0">
+              <a:rPr sz="1200" b="0" i="0">
                 <a:solidFill>
                   <a:srgbClr val="E7F0F3"/>
                 </a:solidFill>
                 <a:latin typeface="Arial"/>
               </a:rPr>
-              <a:t>t₀ → t₁</a:t>
-            </a:r>
-          </a:p>
-        </p:txBody>
-      </p:sp>
-      <p:sp>
-        <p:nvSpPr>
-          <p:cNvPr id="13" name="text12" descr="sci-ppt:C1-E34-012"/>
+              <a:t>tₐ = L/c = 0.067 µs: acoustic time,</a:t>
+            </a:r>
+          </a:p>
+          <a:p>
+            <a:pPr algn="l">
+              <a:spcAft>
+                <a:spcPts val="0"/>
+              </a:spcAft>
+            </a:pPr>
+            <a:r>
+              <a:rPr sz="1200" b="0" i="0">
+                <a:solidFill>
+                  <a:srgbClr val="E7F0F3"/>
+                </a:solidFill>
+                <a:latin typeface="Arial"/>
+              </a:rPr>
+              <a:t>not the impulse</a:t>
+            </a:r>
+          </a:p>
+        </p:txBody>
+      </p:sp>
+      <p:sp>
+        <p:nvSpPr>
+          <p:cNvPr id="41" name="C1-E34 ellipse 39" descr="sci-ppt:o039"/>
+          <p:cNvSpPr/>
+          <p:nvPr/>
+        </p:nvSpPr>
+        <p:spPr>
+          <a:xfrm>
+            <a:off x="8718804" y="2071116"/>
+            <a:ext cx="82296" cy="82296"/>
+          </a:xfrm>
+          <a:prstGeom prst="ellipse">
+            <a:avLst/>
+          </a:prstGeom>
+          <a:solidFill>
+            <a:srgbClr val="8EDBD4"/>
+          </a:solidFill>
+          <a:ln w="12700">
+            <a:solidFill>
+              <a:srgbClr val="8EDBD4"/>
+            </a:solidFill>
+          </a:ln>
+          <a:effectLst/>
+        </p:spPr>
+        <p:txBody>
+          <a:bodyPr rtlCol="0" anchor="ctr"/>
+          <a:lstStyle/>
+          <a:p>
+            <a:pPr algn="ctr"/>
+          </a:p>
+        </p:txBody>
+      </p:sp>
+      <p:sp>
+        <p:nvSpPr>
+          <p:cNvPr id="42" name="C1-E34 round_rect 40" descr="sci-ppt:o040"/>
+          <p:cNvSpPr/>
+          <p:nvPr/>
+        </p:nvSpPr>
+        <p:spPr>
+          <a:xfrm>
+            <a:off x="457200" y="4160520"/>
+            <a:ext cx="11247120" cy="1417320"/>
+          </a:xfrm>
+          <a:prstGeom prst="roundRect">
+            <a:avLst/>
+          </a:prstGeom>
+          <a:solidFill>
+            <a:srgbClr val="213E4B"/>
+          </a:solidFill>
+          <a:ln w="20320">
+            <a:solidFill>
+              <a:srgbClr val="B4C7D2"/>
+            </a:solidFill>
+          </a:ln>
+          <a:effectLst/>
+        </p:spPr>
+        <p:txBody>
+          <a:bodyPr rtlCol="0" anchor="ctr"/>
+          <a:lstStyle/>
+          <a:p>
+            <a:pPr algn="ctr"/>
+          </a:p>
+        </p:txBody>
+      </p:sp>
+      <p:sp>
+        <p:nvSpPr>
+          <p:cNvPr id="43" name="C1-E34 text 41" descr="sci-ppt:o041"/>
           <p:cNvSpPr txBox="1"/>
           <p:nvPr/>
         </p:nvSpPr>
         <p:spPr>
           <a:xfrm>
-            <a:off x="365760" y="5559552"/>
-            <a:ext cx="5547360" cy="321259"/>
+            <a:off x="594360" y="4233672"/>
+            <a:ext cx="10972800" cy="254889"/>
           </a:xfrm>
           <a:prstGeom prst="rect">
             <a:avLst/>
@@ -3494,7 +6858,7 @@
           <a:effectLst/>
         </p:spPr>
         <p:txBody>
-          <a:bodyPr wrap="none" lIns="27432" rIns="27432" tIns="18288" bIns="18288" anchor="ctr">
+          <a:bodyPr wrap="none" lIns="18288" rIns="18288" tIns="18288" bIns="18288" anchor="t">
             <a:spAutoFit/>
           </a:bodyPr>
           <a:lstStyle/>
@@ -3505,27 +6869,27 @@
               </a:spcAft>
             </a:pPr>
             <a:r>
-              <a:rPr sz="1632" b="0" i="0">
+              <a:rPr sz="1350" b="1" i="0">
                 <a:solidFill>
-                  <a:srgbClr val="E7F0F3"/>
+                  <a:srgbClr val="8EDBD4"/>
                 </a:solidFill>
                 <a:latin typeface="Arial"/>
               </a:rPr>
-              <a:t>ρ</a:t>
-            </a:r>
-          </a:p>
-        </p:txBody>
-      </p:sp>
-      <p:sp>
-        <p:nvSpPr>
-          <p:cNvPr id="14" name="text13" descr="sci-ppt:C1-E34-013"/>
+              <a:t>Reference formulas</a:t>
+            </a:r>
+          </a:p>
+        </p:txBody>
+      </p:sp>
+      <p:sp>
+        <p:nvSpPr>
+          <p:cNvPr id="44" name="C1-E34 text 42" descr="sci-ppt:o042"/>
           <p:cNvSpPr txBox="1"/>
           <p:nvPr/>
         </p:nvSpPr>
         <p:spPr>
           <a:xfrm>
-            <a:off x="365760" y="5852160"/>
-            <a:ext cx="5547360" cy="321259"/>
+            <a:off x="594360" y="4572000"/>
+            <a:ext cx="10972800" cy="479551"/>
           </a:xfrm>
           <a:prstGeom prst="rect">
             <a:avLst/>
@@ -3534,7 +6898,7 @@
           <a:effectLst/>
         </p:spPr>
         <p:txBody>
-          <a:bodyPr wrap="none" lIns="27432" rIns="27432" tIns="18288" bIns="18288" anchor="ctr">
+          <a:bodyPr wrap="none" lIns="18288" rIns="18288" tIns="18288" bIns="18288" anchor="t">
             <a:spAutoFit/>
           </a:bodyPr>
           <a:lstStyle/>
@@ -3545,27 +6909,43 @@
               </a:spcAft>
             </a:pPr>
             <a:r>
-              <a:rPr sz="1632" b="0" i="0">
+              <a:rPr sz="1400" b="1" i="0">
                 <a:solidFill>
                   <a:srgbClr val="E7F0F3"/>
                 </a:solidFill>
                 <a:latin typeface="Arial"/>
               </a:rPr>
-              <a:t>L</a:t>
-            </a:r>
-          </a:p>
-        </p:txBody>
-      </p:sp>
-      <p:sp>
-        <p:nvSpPr>
-          <p:cNvPr id="15" name="text14" descr="sci-ppt:C1-E34-014"/>
+              <a:t>Π(x) = ∫(p − p_ref)dt;   Δu ≃ −∇Π/ρ,  ∇²Π = 0</a:t>
+            </a:r>
+          </a:p>
+          <a:p>
+            <a:pPr algn="l">
+              <a:spcAft>
+                <a:spcPts val="0"/>
+              </a:spcAft>
+            </a:pPr>
+            <a:r>
+              <a:rPr sz="1400" b="1" i="0">
+                <a:solidFill>
+                  <a:srgbClr val="E7F0F3"/>
+                </a:solidFill>
+                <a:latin typeface="Arial"/>
+              </a:rPr>
+              <a:t>U_column = Π₀/(ρL);   tₐ = L/c</a:t>
+            </a:r>
+          </a:p>
+        </p:txBody>
+      </p:sp>
+      <p:sp>
+        <p:nvSpPr>
+          <p:cNvPr id="45" name="C1-E34 text 43" descr="sci-ppt:o043"/>
           <p:cNvSpPr txBox="1"/>
           <p:nvPr/>
         </p:nvSpPr>
         <p:spPr>
           <a:xfrm>
-            <a:off x="365760" y="6144768"/>
-            <a:ext cx="5547360" cy="321259"/>
+            <a:off x="457200" y="5760720"/>
+            <a:ext cx="11338560" cy="247142"/>
           </a:xfrm>
           <a:prstGeom prst="rect">
             <a:avLst/>
@@ -3574,7 +6954,7 @@
           <a:effectLst/>
         </p:spPr>
         <p:txBody>
-          <a:bodyPr wrap="none" lIns="27432" rIns="27432" tIns="18288" bIns="18288" anchor="ctr">
+          <a:bodyPr wrap="none" lIns="18288" rIns="18288" tIns="18288" bIns="18288" anchor="t">
             <a:spAutoFit/>
           </a:bodyPr>
           <a:lstStyle/>
@@ -3585,27 +6965,27 @@
               </a:spcAft>
             </a:pPr>
             <a:r>
-              <a:rPr sz="1632" b="0" i="0">
+              <a:rPr sz="1300" b="0" i="0">
                 <a:solidFill>
-                  <a:srgbClr val="E7F0F3"/>
+                  <a:srgbClr val="F2B880"/>
                 </a:solidFill>
                 <a:latin typeface="Arial"/>
               </a:rPr>
-              <a:t>ta = L/c</a:t>
-            </a:r>
-          </a:p>
-        </p:txBody>
-      </p:sp>
-      <p:sp>
-        <p:nvSpPr>
-          <p:cNvPr id="16" name="text15" descr="sci-ppt:C1-E34-015"/>
+              <a:t>The impulse benchmark gives the early velocity field; the moving-interface problem that follows is a separate calculation.</a:t>
+            </a:r>
+          </a:p>
+        </p:txBody>
+      </p:sp>
+      <p:sp>
+        <p:nvSpPr>
+          <p:cNvPr id="46" name="C1-E34 text 44" descr="sci-ppt:o044"/>
           <p:cNvSpPr txBox="1"/>
           <p:nvPr/>
         </p:nvSpPr>
         <p:spPr>
           <a:xfrm>
-            <a:off x="6156960" y="4974336"/>
-            <a:ext cx="5547360" cy="321259"/>
+            <a:off x="320040" y="6510528"/>
+            <a:ext cx="11521440" cy="200660"/>
           </a:xfrm>
           <a:prstGeom prst="rect">
             <a:avLst/>
@@ -3614,7 +6994,7 @@
           <a:effectLst/>
         </p:spPr>
         <p:txBody>
-          <a:bodyPr wrap="none" lIns="27432" rIns="27432" tIns="18288" bIns="18288" anchor="ctr">
+          <a:bodyPr wrap="none" lIns="18288" rIns="18288" tIns="18288" bIns="18288" anchor="t">
             <a:spAutoFit/>
           </a:bodyPr>
           <a:lstStyle/>
@@ -3625,253 +7005,13 @@
               </a:spcAft>
             </a:pPr>
             <a:r>
-              <a:rPr sz="1632" b="0" i="0">
-                <a:solidFill>
-                  <a:srgbClr val="E7F0F3"/>
-                </a:solidFill>
-                <a:latin typeface="Arial"/>
-              </a:rPr>
-              <a:t>p − pref</a:t>
-            </a:r>
-          </a:p>
-        </p:txBody>
-      </p:sp>
-      <p:sp>
-        <p:nvSpPr>
-          <p:cNvPr id="17" name="text16" descr="sci-ppt:C1-E34-016"/>
-          <p:cNvSpPr txBox="1"/>
-          <p:nvPr/>
-        </p:nvSpPr>
-        <p:spPr>
-          <a:xfrm>
-            <a:off x="6156960" y="5266944"/>
-            <a:ext cx="5547360" cy="321259"/>
-          </a:xfrm>
-          <a:prstGeom prst="rect">
-            <a:avLst/>
-          </a:prstGeom>
-          <a:noFill/>
-          <a:effectLst/>
-        </p:spPr>
-        <p:txBody>
-          <a:bodyPr wrap="none" lIns="27432" rIns="27432" tIns="18288" bIns="18288" anchor="ctr">
-            <a:spAutoFit/>
-          </a:bodyPr>
-          <a:lstStyle/>
-          <a:p>
-            <a:pPr algn="l">
-              <a:spcAft>
-                <a:spcPts val="0"/>
-              </a:spcAft>
-            </a:pPr>
-            <a:r>
-              <a:rPr sz="1632" b="0" i="0">
-                <a:solidFill>
-                  <a:srgbClr val="E7F0F3"/>
-                </a:solidFill>
-                <a:latin typeface="Arial"/>
-              </a:rPr>
-              <a:t>Δu ≈ −∇Π/ρ</a:t>
-            </a:r>
-          </a:p>
-        </p:txBody>
-      </p:sp>
-      <p:sp>
-        <p:nvSpPr>
-          <p:cNvPr id="18" name="text17" descr="sci-ppt:C1-E34-017"/>
-          <p:cNvSpPr txBox="1"/>
-          <p:nvPr/>
-        </p:nvSpPr>
-        <p:spPr>
-          <a:xfrm>
-            <a:off x="6156960" y="5559552"/>
-            <a:ext cx="5547360" cy="321259"/>
-          </a:xfrm>
-          <a:prstGeom prst="rect">
-            <a:avLst/>
-          </a:prstGeom>
-          <a:noFill/>
-          <a:effectLst/>
-        </p:spPr>
-        <p:txBody>
-          <a:bodyPr wrap="none" lIns="27432" rIns="27432" tIns="18288" bIns="18288" anchor="ctr">
-            <a:spAutoFit/>
-          </a:bodyPr>
-          <a:lstStyle/>
-          <a:p>
-            <a:pPr algn="l">
-              <a:spcAft>
-                <a:spcPts val="0"/>
-              </a:spcAft>
-            </a:pPr>
-            <a:r>
-              <a:rPr sz="1632" b="0" i="0">
-                <a:solidFill>
-                  <a:srgbClr val="E7F0F3"/>
-                </a:solidFill>
-                <a:latin typeface="Arial"/>
-              </a:rPr>
-              <a:t>Π₀</a:t>
-            </a:r>
-          </a:p>
-        </p:txBody>
-      </p:sp>
-      <p:sp>
-        <p:nvSpPr>
-          <p:cNvPr id="19" name="text18" descr="sci-ppt:C1-E34-018"/>
-          <p:cNvSpPr txBox="1"/>
-          <p:nvPr/>
-        </p:nvSpPr>
-        <p:spPr>
-          <a:xfrm>
-            <a:off x="6156960" y="5852160"/>
-            <a:ext cx="5547360" cy="321259"/>
-          </a:xfrm>
-          <a:prstGeom prst="rect">
-            <a:avLst/>
-          </a:prstGeom>
-          <a:noFill/>
-          <a:effectLst/>
-        </p:spPr>
-        <p:txBody>
-          <a:bodyPr wrap="none" lIns="27432" rIns="27432" tIns="18288" bIns="18288" anchor="ctr">
-            <a:spAutoFit/>
-          </a:bodyPr>
-          <a:lstStyle/>
-          <a:p>
-            <a:pPr algn="l">
-              <a:spcAft>
-                <a:spcPts val="0"/>
-              </a:spcAft>
-            </a:pPr>
-            <a:r>
-              <a:rPr sz="1632" b="0" i="0">
-                <a:solidFill>
-                  <a:srgbClr val="E7F0F3"/>
-                </a:solidFill>
-                <a:latin typeface="Arial"/>
-              </a:rPr>
-              <a:t>Ucolumn</a:t>
-            </a:r>
-          </a:p>
-        </p:txBody>
-      </p:sp>
-      <p:sp>
-        <p:nvSpPr>
-          <p:cNvPr id="20" name="text19" descr="sci-ppt:C1-E34-019"/>
-          <p:cNvSpPr txBox="1"/>
-          <p:nvPr/>
-        </p:nvSpPr>
-        <p:spPr>
-          <a:xfrm>
-            <a:off x="6156960" y="6144768"/>
-            <a:ext cx="5547360" cy="321259"/>
-          </a:xfrm>
-          <a:prstGeom prst="rect">
-            <a:avLst/>
-          </a:prstGeom>
-          <a:noFill/>
-          <a:effectLst/>
-        </p:spPr>
-        <p:txBody>
-          <a:bodyPr wrap="none" lIns="27432" rIns="27432" tIns="18288" bIns="18288" anchor="ctr">
-            <a:spAutoFit/>
-          </a:bodyPr>
-          <a:lstStyle/>
-          <a:p>
-            <a:pPr algn="l">
-              <a:spcAft>
-                <a:spcPts val="0"/>
-              </a:spcAft>
-            </a:pPr>
-            <a:r>
-              <a:rPr sz="1632" b="0" i="0">
-                <a:solidFill>
-                  <a:srgbClr val="E7F0F3"/>
-                </a:solidFill>
-                <a:latin typeface="Arial"/>
-              </a:rPr>
-              <a:t>c</a:t>
-            </a:r>
-          </a:p>
-        </p:txBody>
-      </p:sp>
-      <p:sp>
-        <p:nvSpPr>
-          <p:cNvPr id="21" name="text20" descr="sci-ppt:C1-E34-020"/>
-          <p:cNvSpPr txBox="1"/>
-          <p:nvPr/>
-        </p:nvSpPr>
-        <p:spPr>
-          <a:xfrm>
-            <a:off x="365760" y="6632448"/>
-            <a:ext cx="11277600" cy="302361"/>
-          </a:xfrm>
-          <a:prstGeom prst="rect">
-            <a:avLst/>
-          </a:prstGeom>
-          <a:noFill/>
-          <a:effectLst/>
-        </p:spPr>
-        <p:txBody>
-          <a:bodyPr wrap="none" lIns="27432" rIns="27432" tIns="18288" bIns="18288" anchor="ctr">
-            <a:spAutoFit/>
-          </a:bodyPr>
-          <a:lstStyle/>
-          <a:p>
-            <a:pPr algn="l">
-              <a:spcAft>
-                <a:spcPts val="0"/>
-              </a:spcAft>
-            </a:pPr>
-            <a:r>
-              <a:rPr sz="1536" b="0" i="0">
+              <a:rPr sz="1000" b="0" i="0">
                 <a:solidFill>
                   <a:srgbClr val="B4C7D2"/>
                 </a:solidFill>
                 <a:latin typeface="Arial"/>
               </a:rPr>
-              <a:t>Pa s is impulse per area; seconds is travel time</a:t>
-            </a:r>
-          </a:p>
-        </p:txBody>
-      </p:sp>
-      <p:sp>
-        <p:nvSpPr>
-          <p:cNvPr id="22" name="text21" descr="sci-ppt:C1-E34-021"/>
-          <p:cNvSpPr txBox="1"/>
-          <p:nvPr/>
-        </p:nvSpPr>
-        <p:spPr>
-          <a:xfrm>
-            <a:off x="365760" y="6925056"/>
-            <a:ext cx="11277600" cy="302361"/>
-          </a:xfrm>
-          <a:prstGeom prst="rect">
-            <a:avLst/>
-          </a:prstGeom>
-          <a:noFill/>
-          <a:effectLst/>
-        </p:spPr>
-        <p:txBody>
-          <a:bodyPr wrap="none" lIns="27432" rIns="27432" tIns="18288" bIns="18288" anchor="ctr">
-            <a:spAutoFit/>
-          </a:bodyPr>
-          <a:lstStyle/>
-          <a:p>
-            <a:pPr algn="l">
-              <a:spcAft>
-                <a:spcPts val="0"/>
-              </a:spcAft>
-            </a:pPr>
-            <a:r>
-              <a:rPr sz="1536" b="0" i="0">
-                <a:solidFill>
-                  <a:srgbClr val="B4C7D2"/>
-                </a:solidFill>
-                <a:latin typeface="Arial"/>
-              </a:rPr>
-              <a:t>A spatial gradient, not a scalar peak, sets velocity</a:t>
+              <a:t>Summary of Eqs. C1-E21 to C1-E25 for the declared case.</a:t>
             </a:r>
           </a:p>
         </p:txBody>
